--- a/lecons/F2T/26_S20_L6_P1_Africa_Location_Physical.pptx
+++ b/lecons/F2T/26_S20_L6_P1_Africa_Location_Physical.pptx
@@ -57,9 +57,10 @@
     <p:sldId id="305" r:id="rId51"/>
     <p:sldId id="306" r:id="rId52"/>
     <p:sldId id="307" r:id="rId53"/>
+    <p:sldId id="308" r:id="rId54"/>
   </p:sldIdLst>
   <p:notesMasterIdLst>
-    <p:notesMasterId r:id="rId54"/>
+    <p:notesMasterId r:id="rId55"/>
   </p:notesMasterIdLst>
   <p:sldSz cx="12192000" cy="6858000"/>
   <p:notesSz cx="6858000" cy="12192000"/>
@@ -641,7 +642,7 @@
           <a:p>
             <a:r>
               <a:rPr lang="en-US" dirty="0"/>
-              <a:t>Listen carefully to this situation from real life. During a football tournament, a boy from Brazil asks Kevin: "Where exactly is Africa? Is it a country or a continent? Which seas are around it?" Think about it, because I am going to ask you some questions.</a:t>
+              <a:t>Listen carefully to this situation from real life. During a football tournament, a boy from Brazil asks Kevin: "Where exactly is Africa? Is it a country or a continent? Which seas are around it?" Kevin cannot answer well. He asks his teacher: "How can I describe where Africa is and what it looks like?" Think about it, because I am going to ask you some questions.</a:t>
             </a:r>
             <a:endParaRPr lang="en-US" dirty="0"/>
           </a:p>
@@ -817,7 +818,7 @@
           <a:p>
             <a:r>
               <a:rPr lang="en-US" dirty="0"/>
-              <a:t>Good. The boy does not know where Africa is.</a:t>
+              <a:t>Good. Kevin cannot describe the location and the physical features of Africa.</a:t>
             </a:r>
             <a:endParaRPr lang="en-US" dirty="0"/>
           </a:p>
@@ -993,7 +994,7 @@
           <a:p>
             <a:r>
               <a:rPr lang="en-US" dirty="0"/>
-              <a:t>Good. A continent, with 54 countries.</a:t>
+              <a:t>Good. A continent.</a:t>
             </a:r>
             <a:endParaRPr lang="en-US" dirty="0"/>
           </a:p>
@@ -1081,7 +1082,7 @@
           <a:p>
             <a:r>
               <a:rPr lang="en-US" dirty="0"/>
-              <a:t>Question 3: How can Kevin show him? Think for a moment, then raise your hand to answer.</a:t>
+              <a:t>Question 3: Name one ocean around Africa. Think for a moment, then raise your hand to answer.</a:t>
             </a:r>
             <a:endParaRPr lang="en-US" dirty="0"/>
           </a:p>
@@ -1169,7 +1170,7 @@
           <a:p>
             <a:r>
               <a:rPr lang="en-US" dirty="0"/>
-              <a:t>Good. With a map or a globe.</a:t>
+              <a:t>Good. The Atlantic Ocean (or the Indian Ocean).</a:t>
             </a:r>
             <a:endParaRPr lang="en-US" dirty="0"/>
           </a:p>
@@ -1609,7 +1610,7 @@
           <a:p>
             <a:r>
               <a:rPr lang="en-US" dirty="0"/>
-              <a:t>Here is the question for Activity 1: Name the oceans and seas around Africa. Take one minute to think and write your answer in your rough notebook.</a:t>
+              <a:t>Here is the question for Activity 1: Which ocean lies to the west of Africa? Take one minute to think and write your answer in your rough notebook.</a:t>
             </a:r>
             <a:endParaRPr lang="en-US" dirty="0"/>
           </a:p>
@@ -1697,7 +1698,7 @@
           <a:p>
             <a:r>
               <a:rPr lang="en-US" dirty="0"/>
-              <a:t>Let us check the answer together. The Atlantic Ocean, the Indian Ocean, the Mediterranean Sea and the Red Sea.</a:t>
+              <a:t>Let us check the answer together. The Atlantic Ocean.</a:t>
             </a:r>
             <a:endParaRPr lang="en-US" dirty="0"/>
           </a:p>
@@ -1785,7 +1786,7 @@
           <a:p>
             <a:r>
               <a:rPr lang="en-US" dirty="0"/>
-              <a:t>Activity 2. Look carefully at this picture: the Suez Canal in Egypt. Observe every detail before I ask the question.</a:t>
+              <a:t>Activity 2. Look carefully at this picture: a canal between two seas. Observe every detail before I ask the question.</a:t>
             </a:r>
             <a:endParaRPr lang="en-US" dirty="0"/>
           </a:p>
@@ -1961,7 +1962,7 @@
           <a:p>
             <a:r>
               <a:rPr lang="en-US" dirty="0"/>
-              <a:t>Let us check the answer together. From Asia.</a:t>
+              <a:t>Let us check the answer together. Asia.</a:t>
             </a:r>
             <a:endParaRPr lang="en-US" dirty="0"/>
           </a:p>
@@ -2049,7 +2050,7 @@
           <a:p>
             <a:r>
               <a:rPr lang="en-US" dirty="0"/>
-              <a:t>Activity 3. Look carefully at this diagram: a cross-section of Africa. Observe every detail before I ask the question.</a:t>
+              <a:t>Activity 3. Look carefully at this diagram: the high land of Africa. Observe every detail before I ask the question.</a:t>
             </a:r>
             <a:endParaRPr lang="en-US" dirty="0"/>
           </a:p>
@@ -2137,7 +2138,7 @@
           <a:p>
             <a:r>
               <a:rPr lang="en-US" dirty="0"/>
-              <a:t>Here is the question for Activity 3: Most of Africa is high, flat land. What do we call it? Take one minute to think and write your answer in your rough notebook.</a:t>
+              <a:t>Here is the question for Activity 3: What do we call high, flat land like most of Africa? Take one minute to think and write your answer in your rough notebook.</a:t>
             </a:r>
             <a:endParaRPr lang="en-US" dirty="0"/>
           </a:p>
@@ -2313,7 +2314,7 @@
           <a:p>
             <a:r>
               <a:rPr lang="en-US" dirty="0"/>
-              <a:t>Activity 4. Look carefully at this picture: mount Kilimanjaro, Tanzania. Observe every detail before I ask the question.</a:t>
+              <a:t>Activity 4. Look carefully at this picture: the highest mountain of Africa. Observe every detail before I ask the question.</a:t>
             </a:r>
             <a:endParaRPr lang="en-US" dirty="0"/>
           </a:p>
@@ -2401,7 +2402,7 @@
           <a:p>
             <a:r>
               <a:rPr lang="en-US" dirty="0"/>
-              <a:t>Here is the question for Activity 4: This is the highest mountain of Africa. What is its name? Take one minute to think and write your answer in your rough notebook.</a:t>
+              <a:t>Here is the question for Activity 4: What is the name of the highest mountain of Africa? Take one minute to think and write your answer in your rough notebook.</a:t>
             </a:r>
             <a:endParaRPr lang="en-US" dirty="0"/>
           </a:p>
@@ -2665,7 +2666,7 @@
           <a:p>
             <a:r>
               <a:rPr lang="en-US" dirty="0"/>
-              <a:t>Activity 5. Look carefully at this picture: the River Nile in Egypt. Observe every detail before I ask the question.</a:t>
+              <a:t>Activity 5. Look carefully at this picture: the longest river of Africa. Observe every detail before I ask the question.</a:t>
             </a:r>
             <a:endParaRPr lang="en-US" dirty="0"/>
           </a:p>
@@ -2753,7 +2754,7 @@
           <a:p>
             <a:r>
               <a:rPr lang="en-US" dirty="0"/>
-              <a:t>Here is the question for Activity 5: This is the longest river of Africa. What is its name? Take one minute to think and write your answer in your rough notebook.</a:t>
+              <a:t>Here is the question for Activity 5: What is the longest river of Africa? Take one minute to think and write your answer in your rough notebook.</a:t>
             </a:r>
             <a:endParaRPr lang="en-US" dirty="0"/>
           </a:p>
@@ -2841,7 +2842,7 @@
           <a:p>
             <a:r>
               <a:rPr lang="en-US" dirty="0"/>
-              <a:t>Let us check the answer together. The Nile (about 6,650 km).</a:t>
+              <a:t>Let us check the answer together. The Nile.</a:t>
             </a:r>
             <a:endParaRPr lang="en-US" dirty="0"/>
           </a:p>
@@ -3105,7 +3106,7 @@
           <a:p>
             <a:r>
               <a:rPr lang="en-US" dirty="0"/>
-              <a:t>Let us copy Location and Size. Africa is located as follows. On this slide we have Seas and oceans and The Equator. Write each point on a new line, with the key term first, and explain it in your own words when we revise. When you finish, we go to the next slide.</a:t>
+              <a:t>Let us copy Location. Africa is located as follows. Copy the point on Latitudes on the left, then draw the diagram on the right: africa and the seas around it. Give it a title and label it clearly.</a:t>
             </a:r>
             <a:endParaRPr lang="en-US" dirty="0"/>
           </a:p>
@@ -3193,7 +3194,7 @@
           <a:p>
             <a:r>
               <a:rPr lang="en-US" dirty="0"/>
-              <a:t>We continue with Location and Size. On this slide we have Neighbours and Size. Write each point on a new line, with the key term first, and explain it in your own words when we revise.</a:t>
+              <a:t>We continue with Location. On this slide we have Longitudes, Oceans and seas and Size. Write each point on a new line, with the key term first, and explain it in your own words when we revise. When you finish, we go to the next slide.</a:t>
             </a:r>
             <a:endParaRPr lang="en-US" dirty="0"/>
           </a:p>
@@ -3281,7 +3282,7 @@
           <a:p>
             <a:r>
               <a:rPr lang="en-US" dirty="0"/>
-              <a:t>Now draw this illustration in your notebook: location of Africa. Give it a title and label it clearly.</a:t>
+              <a:t>We continue with Location. On this slide we have Cameroon. Write each point on a new line, with the key term first, and explain it in your own words when we revise.</a:t>
             </a:r>
             <a:endParaRPr lang="en-US" dirty="0"/>
           </a:p>
@@ -3369,7 +3370,7 @@
           <a:p>
             <a:r>
               <a:rPr lang="en-US" dirty="0"/>
-              <a:t>Let us copy Physical Characteristics. Africa has the following physical characteristics. On this slide we have A plateau continent and Highest point. Write each point on a new line, with the key term first, and explain it in your own words when we revise. When you finish, we go to the next slide.</a:t>
+              <a:t>Let us copy Physical Characteristics. Africa has the following physical characteristics. Copy the point on A high plateau on the left, then draw the diagram on the right: the plateau of Africa. Give it a title and label it clearly.</a:t>
             </a:r>
             <a:endParaRPr lang="en-US" dirty="0"/>
           </a:p>
@@ -3545,7 +3546,7 @@
           <a:p>
             <a:r>
               <a:rPr lang="en-US" dirty="0"/>
-              <a:t>We continue with Physical Characteristics. On this slide we have Longest river and Coast. Write each point on a new line, with the key term first, and explain it in your own words when we revise.</a:t>
+              <a:t>Copy the point on High mountains on the left, then draw the diagram on the right: kilimanjaro. Give it a title and label it clearly.</a:t>
             </a:r>
             <a:endParaRPr lang="en-US" dirty="0"/>
           </a:p>
@@ -3633,7 +3634,7 @@
           <a:p>
             <a:r>
               <a:rPr lang="en-US" dirty="0"/>
-              <a:t>Now let us check what you have understood. Question 1: Name the four seas and oceans around Africa. Answer in your exercise book.</a:t>
+              <a:t>We continue with Physical Characteristics. On this slide we have Rift Valley, Big rivers and lakes and Few coastal plains. Write each point on a new line, with the key term first, and explain it in your own words when we revise.</a:t>
             </a:r>
             <a:endParaRPr lang="en-US" dirty="0"/>
           </a:p>
@@ -3721,7 +3722,7 @@
           <a:p>
             <a:r>
               <a:rPr lang="en-US" dirty="0"/>
-              <a:t>The expected answer is: atlantic, Indian, Mediterranean and Red Sea. If you got it right, well done.</a:t>
+              <a:t>Now let us check what you have understood. Question 1: Name the four seas and oceans around Africa. Answer in your exercise book.</a:t>
             </a:r>
             <a:endParaRPr lang="en-US" dirty="0"/>
           </a:p>
@@ -3809,7 +3810,7 @@
           <a:p>
             <a:r>
               <a:rPr lang="en-US" dirty="0"/>
-              <a:t>Now let us check what you have understood. Question 2: What is the highest mountain of Africa? Answer in your exercise book.</a:t>
+              <a:t>The expected answer is: atlantic, Indian, Mediterranean and Red Sea. If you got it right, well done.</a:t>
             </a:r>
             <a:endParaRPr lang="en-US" dirty="0"/>
           </a:p>
@@ -3897,7 +3898,7 @@
           <a:p>
             <a:r>
               <a:rPr lang="en-US" dirty="0"/>
-              <a:t>The expected answer is: kilimanjaro. If you got it right, well done.</a:t>
+              <a:t>Now let us check what you have understood. Question 2: What is the highest mountain of Africa? Answer in your exercise book.</a:t>
             </a:r>
             <a:endParaRPr lang="en-US" dirty="0"/>
           </a:p>
@@ -3985,7 +3986,7 @@
           <a:p>
             <a:r>
               <a:rPr lang="en-US" dirty="0"/>
-              <a:t>For those who need more practice, fill in the blanks in your exercise book. The answers are: number 1, continent; number 2, Nile; number 3, plateau.</a:t>
+              <a:t>The expected answer is: kilimanjaro. If you got it right, well done.</a:t>
             </a:r>
             <a:endParaRPr lang="en-US" dirty="0"/>
           </a:p>
@@ -4073,7 +4074,7 @@
           <a:p>
             <a:r>
               <a:rPr lang="en-US" dirty="0"/>
-              <a:t>For your homework: Compare the climate of Douala, Garoua and Maroua. Which town is the wettest, and which is the driest? Ask an adult or use your textbook. We shall correct it at the beginning of our next lesson.</a:t>
+              <a:t>For those who need more practice, fill in the blanks in your exercise book. The answers are: number 1, continent; number 2, Nile; number 3, plateau.</a:t>
             </a:r>
             <a:endParaRPr lang="en-US" dirty="0"/>
           </a:p>
@@ -4161,7 +4162,7 @@
           <a:p>
             <a:r>
               <a:rPr lang="en-US" dirty="0"/>
-              <a:t>Our next lesson will be on Lesson 6 (Part 2): Africa: Climate, Soils and Relief of Africa. Thank you for your attention, and see you next time.</a:t>
+              <a:t>For your homework: Compare the climate of Douala, Garoua and Maroua. Which town is the wettest, and which is the driest? Ask an adult or use your textbook. We shall correct it at the beginning of our next lesson.</a:t>
             </a:r>
             <a:endParaRPr lang="en-US" dirty="0"/>
           </a:p>
@@ -4249,7 +4250,7 @@
           <a:p>
             <a:r>
               <a:rPr lang="en-US" dirty="0"/>
-              <a:t>Let us play the bilingual game. I say a word in English, and you give me the French word. Then we do the reverse.</a:t>
+              <a:t>Our next lesson will be on Lesson 6 (Part 2): Africa: Climate, Soils and Relief of Africa. Thank you for your attention, and see you next time.</a:t>
             </a:r>
             <a:endParaRPr lang="en-US" dirty="0"/>
           </a:p>
@@ -4337,7 +4338,7 @@
           <a:p>
             <a:r>
               <a:rPr lang="en-US" dirty="0"/>
-              <a:t>I record this information in the official logbook of the class after the lesson.</a:t>
+              <a:t>Let us play the bilingual game. I say a word in English, and you give me the French word. Then we do the reverse.</a:t>
             </a:r>
             <a:endParaRPr lang="en-US" dirty="0"/>
           </a:p>
@@ -4513,7 +4514,7 @@
           <a:p>
             <a:r>
               <a:rPr lang="en-US" dirty="0"/>
-              <a:t>I complete the second page of the logbook: the matter taught, the evaluation, the homework and the attendance.</a:t>
+              <a:t>I record this information in the official logbook of the class after the lesson.</a:t>
             </a:r>
             <a:endParaRPr lang="en-US" dirty="0"/>
           </a:p>
@@ -4601,7 +4602,7 @@
           <a:p>
             <a:r>
               <a:rPr lang="en-US" dirty="0"/>
-              <a:t>This slide is for me, the teacher: it gives the timing of the lesson and what to do if the projector is not available.</a:t>
+              <a:t>I complete the second page of the logbook: the matter taught, the evaluation, the homework and the attendance.</a:t>
             </a:r>
             <a:endParaRPr lang="en-US" dirty="0"/>
           </a:p>
@@ -4689,7 +4690,7 @@
           <a:p>
             <a:r>
               <a:rPr lang="en-US" dirty="0"/>
-              <a:t>These are the references and picture credits used to prepare this lesson.</a:t>
+              <a:t>This slide is for me, the teacher: it gives the timing of the lesson and what to do if the projector is not available.</a:t>
             </a:r>
             <a:endParaRPr lang="en-US" dirty="0"/>
           </a:p>
@@ -4713,6 +4714,94 @@
             <a:fld id="{F7021451-1387-4CA6-816F-3879F97B5CBC}" type="slidenum">
               <a:rPr lang="en-US"/>
               <a:t>52</a:t>
+            </a:fld>
+            <a:endParaRPr lang="en-US"/>
+          </a:p>
+        </p:txBody>
+      </p:sp>
+    </p:spTree>
+    <p:extLst>
+      <p:ext uri="{BB962C8B-B14F-4D97-AF65-F5344CB8AC3E}">
+        <p14:creationId xmlns:p14="http://schemas.microsoft.com/office/powerpoint/2010/main" val="1024086991"/>
+      </p:ext>
+    </p:extLst>
+  </p:cSld>
+  <p:clrMapOvr>
+    <a:masterClrMapping/>
+  </p:clrMapOvr>
+</p:notes>
+</file>
+
+<file path=ppt/notesSlides/notesSlide53.xml><?xml version="1.0" encoding="utf-8"?>
+<p:notes xmlns:a="http://schemas.openxmlformats.org/drawingml/2006/main" xmlns:r="http://schemas.openxmlformats.org/officeDocument/2006/relationships" xmlns:p="http://schemas.openxmlformats.org/presentationml/2006/main">
+  <p:cSld>
+    <p:spTree>
+      <p:nvGrpSpPr>
+        <p:cNvPr id="1" name=""/>
+        <p:cNvGrpSpPr/>
+        <p:nvPr/>
+      </p:nvGrpSpPr>
+      <p:grpSpPr>
+        <a:xfrm>
+          <a:off x="0" y="0"/>
+          <a:ext cx="0" cy="0"/>
+          <a:chOff x="0" y="0"/>
+          <a:chExt cx="0" cy="0"/>
+        </a:xfrm>
+      </p:grpSpPr>
+      <p:sp>
+        <p:nvSpPr>
+          <p:cNvPr id="2" name="Slide Image Placeholder 1"/>
+          <p:cNvSpPr>
+            <a:spLocks noGrp="1" noRot="1" noChangeAspect="1"/>
+          </p:cNvSpPr>
+          <p:nvPr>
+            <p:ph type="sldImg"/>
+          </p:nvPr>
+        </p:nvSpPr>
+        <p:spPr/>
+      </p:sp>
+      <p:sp>
+        <p:nvSpPr>
+          <p:cNvPr id="3" name="Notes Placeholder 2"/>
+          <p:cNvSpPr>
+            <a:spLocks noGrp="1"/>
+          </p:cNvSpPr>
+          <p:nvPr>
+            <p:ph type="body" idx="1"/>
+          </p:nvPr>
+        </p:nvSpPr>
+        <p:spPr/>
+        <p:txBody>
+          <a:bodyPr/>
+          <a:lstStyle/>
+          <a:p>
+            <a:r>
+              <a:rPr lang="en-US" dirty="0"/>
+              <a:t>These are the references and picture credits used to prepare this lesson.</a:t>
+            </a:r>
+            <a:endParaRPr lang="en-US" dirty="0"/>
+          </a:p>
+        </p:txBody>
+      </p:sp>
+      <p:sp>
+        <p:nvSpPr>
+          <p:cNvPr id="4" name="Slide Number Placeholder 3"/>
+          <p:cNvSpPr>
+            <a:spLocks noGrp="1"/>
+          </p:cNvSpPr>
+          <p:nvPr>
+            <p:ph type="sldNum" sz="quarter" idx="10"/>
+          </p:nvPr>
+        </p:nvSpPr>
+        <p:spPr/>
+        <p:txBody>
+          <a:bodyPr/>
+          <a:lstStyle/>
+          <a:p>
+            <a:fld id="{F7021451-1387-4CA6-816F-3879F97B5CBC}" type="slidenum">
+              <a:rPr lang="en-US"/>
+              <a:t>53</a:t>
             </a:fld>
             <a:endParaRPr lang="en-US"/>
           </a:p>
@@ -6421,7 +6510,7 @@
         <p:spPr>
           <a:xfrm>
             <a:off x="0" y="658368"/>
-            <a:ext cx="5120640" cy="5833872"/>
+            <a:ext cx="2468880" cy="5833872"/>
           </a:xfrm>
           <a:prstGeom prst="rect">
             <a:avLst/>
@@ -6436,8 +6525,8 @@
         </p:nvSpPr>
         <p:spPr>
           <a:xfrm>
-            <a:off x="5349240" y="1005840"/>
-            <a:ext cx="6522415" cy="731520"/>
+            <a:off x="2697480" y="1005840"/>
+            <a:ext cx="9174175" cy="731520"/>
           </a:xfrm>
           <a:prstGeom prst="rect">
             <a:avLst/>
@@ -6477,8 +6566,8 @@
         </p:nvSpPr>
         <p:spPr>
           <a:xfrm>
-            <a:off x="5349240" y="1783080"/>
-            <a:ext cx="6522415" cy="4663440"/>
+            <a:off x="2697480" y="1783080"/>
+            <a:ext cx="9174175" cy="4663440"/>
           </a:xfrm>
           <a:prstGeom prst="rect">
             <a:avLst/>
@@ -6505,7 +6594,7 @@
                 <a:ea typeface="Times New Roman" pitchFamily="34" charset="-122"/>
                 <a:cs typeface="Times New Roman" pitchFamily="34" charset="-120"/>
               </a:rPr>
-              <a:t>During a football tournament, a boy from Brazil asks Kevin: "Where exactly is Africa? Is it a country or a continent? Which seas are around it?"</a:t>
+              <a:t>During a football tournament, a boy from Brazil asks Kevin: "Where exactly is Africa? Is it a country or a continent? Which seas are around it?" Kevin cannot answer well. He asks his teacher: "How can I describe where Africa is and what it looks like?"</a:t>
             </a:r>
             <a:endParaRPr lang="en-US" sz="4000" dirty="0"/>
           </a:p>
@@ -6943,7 +7032,7 @@
                 <a:ea typeface="Times New Roman" pitchFamily="34" charset="-122"/>
                 <a:cs typeface="Times New Roman" pitchFamily="34" charset="-120"/>
               </a:rPr>
-              <a:t>The boy does not know where Africa is.</a:t>
+              <a:t>Kevin cannot describe the location and the physical features of Africa.</a:t>
             </a:r>
             <a:endParaRPr lang="en-US" sz="4000" dirty="0"/>
           </a:p>
@@ -7381,7 +7470,7 @@
                 <a:ea typeface="Times New Roman" pitchFamily="34" charset="-122"/>
                 <a:cs typeface="Times New Roman" pitchFamily="34" charset="-120"/>
               </a:rPr>
-              <a:t>A continent, with 54 countries.</a:t>
+              <a:t>A continent.</a:t>
             </a:r>
             <a:endParaRPr lang="en-US" sz="4000" dirty="0"/>
           </a:p>
@@ -7600,7 +7689,7 @@
                 <a:ea typeface="Times New Roman" pitchFamily="34" charset="-122"/>
                 <a:cs typeface="Times New Roman" pitchFamily="34" charset="-120"/>
               </a:rPr>
-              <a:t>How can Kevin show him?</a:t>
+              <a:t>Name one ocean around Africa.</a:t>
             </a:r>
             <a:endParaRPr lang="en-US" sz="4000" dirty="0"/>
           </a:p>
@@ -7819,7 +7908,7 @@
                 <a:ea typeface="Times New Roman" pitchFamily="34" charset="-122"/>
                 <a:cs typeface="Times New Roman" pitchFamily="34" charset="-120"/>
               </a:rPr>
-              <a:t>With a map or a globe.</a:t>
+              <a:t>The Atlantic Ocean (or the Indian Ocean).</a:t>
             </a:r>
             <a:endParaRPr lang="en-US" sz="4000" dirty="0"/>
           </a:p>
@@ -8369,7 +8458,7 @@
                 <a:ea typeface="Calibri" pitchFamily="34" charset="-122"/>
                 <a:cs typeface="Calibri" pitchFamily="34" charset="-120"/>
               </a:rPr>
-              <a:t>1. LOCATION AND SIZE</a:t>
+              <a:t>1. LOCATION</a:t>
             </a:r>
             <a:endParaRPr lang="en-US" sz="1400" dirty="0"/>
           </a:p>
@@ -9178,7 +9267,7 @@
                 <a:ea typeface="Calibri" pitchFamily="34" charset="-122"/>
                 <a:cs typeface="Calibri" pitchFamily="34" charset="-120"/>
               </a:rPr>
-              <a:t>1. LOCATION AND SIZE</a:t>
+              <a:t>1. LOCATION</a:t>
             </a:r>
             <a:endParaRPr lang="en-US" sz="1400" dirty="0"/>
           </a:p>
@@ -9285,7 +9374,7 @@
                 <a:ea typeface="Times New Roman" pitchFamily="34" charset="-122"/>
                 <a:cs typeface="Times New Roman" pitchFamily="34" charset="-120"/>
               </a:rPr>
-              <a:t>Name the oceans and seas around Africa.</a:t>
+              <a:t>Which ocean lies to the west of Africa?</a:t>
             </a:r>
             <a:endParaRPr lang="en-US" sz="4000" dirty="0"/>
           </a:p>
@@ -9397,7 +9486,7 @@
                 <a:ea typeface="Calibri" pitchFamily="34" charset="-122"/>
                 <a:cs typeface="Calibri" pitchFamily="34" charset="-120"/>
               </a:rPr>
-              <a:t>1. LOCATION AND SIZE</a:t>
+              <a:t>1. LOCATION</a:t>
             </a:r>
             <a:endParaRPr lang="en-US" sz="1400" dirty="0"/>
           </a:p>
@@ -9504,7 +9593,7 @@
                 <a:ea typeface="Times New Roman" pitchFamily="34" charset="-122"/>
                 <a:cs typeface="Times New Roman" pitchFamily="34" charset="-120"/>
               </a:rPr>
-              <a:t>The Atlantic Ocean, the Indian Ocean, the Mediterranean Sea and the Red Sea.</a:t>
+              <a:t>The Atlantic Ocean.</a:t>
             </a:r>
             <a:endParaRPr lang="en-US" sz="4000" dirty="0"/>
           </a:p>
@@ -9616,7 +9705,7 @@
                 <a:ea typeface="Calibri" pitchFamily="34" charset="-122"/>
                 <a:cs typeface="Calibri" pitchFamily="34" charset="-120"/>
               </a:rPr>
-              <a:t>1. LOCATION AND SIZE</a:t>
+              <a:t>1. LOCATION</a:t>
             </a:r>
             <a:endParaRPr lang="en-US" sz="1400" dirty="0"/>
           </a:p>
@@ -9718,7 +9807,7 @@
                 <a:ea typeface="Times New Roman" pitchFamily="34" charset="-122"/>
                 <a:cs typeface="Times New Roman" pitchFamily="34" charset="-120"/>
               </a:rPr>
-              <a:t>The Suez Canal in Egypt.</a:t>
+              <a:t>A canal between two seas.</a:t>
             </a:r>
             <a:endParaRPr lang="en-US" sz="1800" dirty="0"/>
           </a:p>
@@ -9830,7 +9919,7 @@
                 <a:ea typeface="Calibri" pitchFamily="34" charset="-122"/>
                 <a:cs typeface="Calibri" pitchFamily="34" charset="-120"/>
               </a:rPr>
-              <a:t>1. LOCATION AND SIZE</a:t>
+              <a:t>1. LOCATION</a:t>
             </a:r>
             <a:endParaRPr lang="en-US" sz="1400" dirty="0"/>
           </a:p>
@@ -10049,7 +10138,7 @@
                 <a:ea typeface="Calibri" pitchFamily="34" charset="-122"/>
                 <a:cs typeface="Calibri" pitchFamily="34" charset="-120"/>
               </a:rPr>
-              <a:t>1. LOCATION AND SIZE</a:t>
+              <a:t>1. LOCATION</a:t>
             </a:r>
             <a:endParaRPr lang="en-US" sz="1400" dirty="0"/>
           </a:p>
@@ -10156,7 +10245,7 @@
                 <a:ea typeface="Times New Roman" pitchFamily="34" charset="-122"/>
                 <a:cs typeface="Times New Roman" pitchFamily="34" charset="-120"/>
               </a:rPr>
-              <a:t>From Asia.</a:t>
+              <a:t>Asia.</a:t>
             </a:r>
             <a:endParaRPr lang="en-US" sz="4000" dirty="0"/>
           </a:p>
@@ -10370,7 +10459,7 @@
                 <a:ea typeface="Times New Roman" pitchFamily="34" charset="-122"/>
                 <a:cs typeface="Times New Roman" pitchFamily="34" charset="-120"/>
               </a:rPr>
-              <a:t>A cross-section of Africa.</a:t>
+              <a:t>The high land of Africa.</a:t>
             </a:r>
             <a:endParaRPr lang="en-US" sz="1800" dirty="0"/>
           </a:p>
@@ -10589,7 +10678,7 @@
                 <a:ea typeface="Times New Roman" pitchFamily="34" charset="-122"/>
                 <a:cs typeface="Times New Roman" pitchFamily="34" charset="-120"/>
               </a:rPr>
-              <a:t>Most of Africa is high, flat land. What do we call it?</a:t>
+              <a:t>What do we call high, flat land like most of Africa?</a:t>
             </a:r>
             <a:endParaRPr lang="en-US" sz="4000" dirty="0"/>
           </a:p>
@@ -11022,7 +11111,7 @@
                 <a:ea typeface="Times New Roman" pitchFamily="34" charset="-122"/>
                 <a:cs typeface="Times New Roman" pitchFamily="34" charset="-120"/>
               </a:rPr>
-              <a:t>Mount Kilimanjaro, Tanzania.</a:t>
+              <a:t>The highest mountain of Africa.</a:t>
             </a:r>
             <a:endParaRPr lang="en-US" sz="1800" dirty="0"/>
           </a:p>
@@ -11241,7 +11330,7 @@
                 <a:ea typeface="Times New Roman" pitchFamily="34" charset="-122"/>
                 <a:cs typeface="Times New Roman" pitchFamily="34" charset="-120"/>
               </a:rPr>
-              <a:t>This is the highest mountain of Africa. What is its name?</a:t>
+              <a:t>What is the name of the highest mountain of Africa?</a:t>
             </a:r>
             <a:endParaRPr lang="en-US" sz="4000" dirty="0"/>
           </a:p>
@@ -12683,7 +12772,7 @@
                 <a:ea typeface="Times New Roman" pitchFamily="34" charset="-122"/>
                 <a:cs typeface="Times New Roman" pitchFamily="34" charset="-120"/>
               </a:rPr>
-              <a:t>The River Nile in Egypt.</a:t>
+              <a:t>The longest river of Africa.</a:t>
             </a:r>
             <a:endParaRPr lang="en-US" sz="1800" dirty="0"/>
           </a:p>
@@ -12902,7 +12991,7 @@
                 <a:ea typeface="Times New Roman" pitchFamily="34" charset="-122"/>
                 <a:cs typeface="Times New Roman" pitchFamily="34" charset="-120"/>
               </a:rPr>
-              <a:t>This is the longest river of Africa. What is its name?</a:t>
+              <a:t>What is the longest river of Africa?</a:t>
             </a:r>
             <a:endParaRPr lang="en-US" sz="4000" dirty="0"/>
           </a:p>
@@ -13121,7 +13210,7 @@
                 <a:ea typeface="Times New Roman" pitchFamily="34" charset="-122"/>
                 <a:cs typeface="Times New Roman" pitchFamily="34" charset="-120"/>
               </a:rPr>
-              <a:t>The Nile (about 6,650 km).</a:t>
+              <a:t>The Nile.</a:t>
             </a:r>
             <a:endParaRPr lang="en-US" sz="4000" dirty="0"/>
           </a:p>
@@ -13604,11 +13693,12 @@
             <a:endParaRPr lang="en-US" sz="4000" dirty="0"/>
           </a:p>
           <a:p>
-            <a:pPr algn="l" indent="0" marL="0">
+            <a:pPr algn="l" marL="342900" indent="-342900">
               <a:spcAft>
                 <a:spcPts val="800"/>
               </a:spcAft>
-              <a:buNone/>
+              <a:buSzPct val="100000"/>
+              <a:buChar char="•"/>
             </a:pPr>
             <a:r>
               <a:rPr lang="en-US" sz="4000" b="1" dirty="0">
@@ -13621,11 +13711,12 @@
               </a:rPr>
               <a:t>Continent: </a:t>
             </a:r>
-            <a:pPr algn="l" indent="0" marL="0">
+            <a:pPr algn="l" marL="342900" indent="-342900">
               <a:spcAft>
                 <a:spcPts val="800"/>
               </a:spcAft>
-              <a:buNone/>
+              <a:buSzPct val="100000"/>
+              <a:buChar char="•"/>
             </a:pPr>
             <a:r>
               <a:rPr lang="en-US" sz="4000" dirty="0">
@@ -13636,16 +13727,17 @@
                 <a:ea typeface="Times New Roman" pitchFamily="34" charset="-122"/>
                 <a:cs typeface="Times New Roman" pitchFamily="34" charset="-120"/>
               </a:rPr>
-              <a:t>It is a very large area of land.</a:t>
+              <a:t>It is a very large mass of land.</a:t>
             </a:r>
             <a:endParaRPr lang="en-US" sz="4000" dirty="0"/>
           </a:p>
           <a:p>
-            <a:pPr algn="l" indent="0" marL="0">
+            <a:pPr algn="l" marL="342900" indent="-342900">
               <a:spcAft>
                 <a:spcPts val="800"/>
               </a:spcAft>
-              <a:buNone/>
+              <a:buSzPct val="100000"/>
+              <a:buChar char="•"/>
             </a:pPr>
             <a:r>
               <a:rPr lang="en-US" sz="4000" b="1" dirty="0">
@@ -13658,11 +13750,12 @@
               </a:rPr>
               <a:t>Plateau: </a:t>
             </a:r>
-            <a:pPr algn="l" indent="0" marL="0">
+            <a:pPr algn="l" marL="342900" indent="-342900">
               <a:spcAft>
                 <a:spcPts val="800"/>
               </a:spcAft>
-              <a:buNone/>
+              <a:buSzPct val="100000"/>
+              <a:buChar char="•"/>
             </a:pPr>
             <a:r>
               <a:rPr lang="en-US" sz="4000" dirty="0">
@@ -13673,7 +13766,7 @@
                 <a:ea typeface="Times New Roman" pitchFamily="34" charset="-122"/>
                 <a:cs typeface="Times New Roman" pitchFamily="34" charset="-120"/>
               </a:rPr>
-              <a:t>It is a high, flat area of land.</a:t>
+              <a:t>It is a large area of high, flat land.</a:t>
             </a:r>
             <a:endParaRPr lang="en-US" sz="4000" dirty="0"/>
           </a:p>
@@ -13791,9 +13884,131 @@
           </a:p>
         </p:txBody>
       </p:sp>
+      <p:sp>
+        <p:nvSpPr>
+          <p:cNvPr id="3" name="Text 1"/>
+          <p:cNvSpPr/>
+          <p:nvPr/>
+        </p:nvSpPr>
+        <p:spPr>
+          <a:xfrm>
+            <a:off x="365760" y="1005840"/>
+            <a:ext cx="11460175" cy="731520"/>
+          </a:xfrm>
+          <a:prstGeom prst="rect">
+            <a:avLst/>
+          </a:prstGeom>
+          <a:noFill/>
+          <a:ln/>
+        </p:spPr>
+        <p:txBody>
+          <a:bodyPr wrap="square" lIns="0" tIns="0" rIns="0" bIns="0" rtlCol="0" anchor="ctr">
+            <a:normAutofit/>
+          </a:bodyPr>
+          <a:lstStyle/>
+          <a:p>
+            <a:pPr algn="ctr" indent="0" marL="0">
+              <a:buNone/>
+            </a:pPr>
+            <a:r>
+              <a:rPr lang="en-US" sz="3600" b="1" dirty="0">
+                <a:solidFill>
+                  <a:srgbClr val="990011"/>
+                </a:solidFill>
+                <a:latin typeface="Times New Roman" pitchFamily="34" charset="0"/>
+                <a:ea typeface="Times New Roman" pitchFamily="34" charset="-122"/>
+                <a:cs typeface="Times New Roman" pitchFamily="34" charset="-120"/>
+              </a:rPr>
+              <a:t>1. Location</a:t>
+            </a:r>
+            <a:endParaRPr lang="en-US" sz="3600" dirty="0"/>
+          </a:p>
+        </p:txBody>
+      </p:sp>
+      <p:sp>
+        <p:nvSpPr>
+          <p:cNvPr id="4" name="Text 2"/>
+          <p:cNvSpPr/>
+          <p:nvPr/>
+        </p:nvSpPr>
+        <p:spPr>
+          <a:xfrm>
+            <a:off x="365760" y="1783080"/>
+            <a:ext cx="4846320" cy="4617720"/>
+          </a:xfrm>
+          <a:prstGeom prst="rect">
+            <a:avLst/>
+          </a:prstGeom>
+          <a:noFill/>
+          <a:ln/>
+        </p:spPr>
+        <p:txBody>
+          <a:bodyPr wrap="square" lIns="0" tIns="0" rIns="0" bIns="0" rtlCol="0" anchor="t"/>
+          <a:lstStyle/>
+          <a:p>
+            <a:pPr algn="l" indent="0" marL="0">
+              <a:spcAft>
+                <a:spcPts val="800"/>
+              </a:spcAft>
+              <a:buNone/>
+            </a:pPr>
+            <a:r>
+              <a:rPr lang="en-US" sz="3600" i="1" dirty="0">
+                <a:solidFill>
+                  <a:srgbClr val="111111"/>
+                </a:solidFill>
+                <a:latin typeface="Times New Roman" pitchFamily="34" charset="0"/>
+                <a:ea typeface="Times New Roman" pitchFamily="34" charset="-122"/>
+                <a:cs typeface="Times New Roman" pitchFamily="34" charset="-120"/>
+              </a:rPr>
+              <a:t>Africa is located as follows:</a:t>
+            </a:r>
+            <a:endParaRPr lang="en-US" sz="3600" dirty="0"/>
+          </a:p>
+          <a:p>
+            <a:pPr algn="l" marL="342900" indent="-342900">
+              <a:spcAft>
+                <a:spcPts val="800"/>
+              </a:spcAft>
+              <a:buSzPct val="100000"/>
+              <a:buChar char="•"/>
+            </a:pPr>
+            <a:r>
+              <a:rPr lang="en-US" sz="3600" b="1" dirty="0">
+                <a:solidFill>
+                  <a:srgbClr val="111111"/>
+                </a:solidFill>
+                <a:latin typeface="Times New Roman" pitchFamily="34" charset="0"/>
+                <a:ea typeface="Times New Roman" pitchFamily="34" charset="-122"/>
+                <a:cs typeface="Times New Roman" pitchFamily="34" charset="-120"/>
+              </a:rPr>
+              <a:t>Latitudes: </a:t>
+            </a:r>
+            <a:pPr algn="l" marL="342900" indent="-342900">
+              <a:spcAft>
+                <a:spcPts val="800"/>
+              </a:spcAft>
+              <a:buSzPct val="100000"/>
+              <a:buChar char="•"/>
+            </a:pPr>
+            <a:r>
+              <a:rPr lang="en-US" sz="3600" dirty="0">
+                <a:solidFill>
+                  <a:srgbClr val="111111"/>
+                </a:solidFill>
+                <a:latin typeface="Times New Roman" pitchFamily="34" charset="0"/>
+                <a:ea typeface="Times New Roman" pitchFamily="34" charset="-122"/>
+                <a:cs typeface="Times New Roman" pitchFamily="34" charset="-120"/>
+              </a:rPr>
+              <a:t>From about 37° N to 35° S, crossed by the Equator.</a:t>
+            </a:r>
+            <a:endParaRPr lang="en-US" sz="3600" dirty="0"/>
+          </a:p>
+        </p:txBody>
+      </p:sp>
       <p:pic>
         <p:nvPicPr>
-          <p:cNvPr id="3" name="Image 0" descr="/home/claude/f4/img/minesec_sheet.png">    </p:cNvPr>
+          <p:cNvPr id="5" name="Image 0" descr="/home/claude/f4/img/v2/africa_location_big.png">    </p:cNvPr>
           <p:cNvPicPr>
             <a:picLocks noChangeAspect="1"/>
           </p:cNvPicPr>
@@ -13807,8 +14022,8 @@
         </p:blipFill>
         <p:spPr>
           <a:xfrm>
-            <a:off x="0" y="658368"/>
-            <a:ext cx="3840480" cy="5833872"/>
+            <a:off x="5349240" y="2045198"/>
+            <a:ext cx="6659575" cy="3746011"/>
           </a:xfrm>
           <a:prstGeom prst="rect">
             <a:avLst/>
@@ -13817,14 +14032,14 @@
       </p:pic>
       <p:sp>
         <p:nvSpPr>
-          <p:cNvPr id="4" name="Text 1"/>
+          <p:cNvPr id="6" name="Text 3"/>
           <p:cNvSpPr/>
           <p:nvPr/>
         </p:nvSpPr>
         <p:spPr>
           <a:xfrm>
-            <a:off x="4069080" y="1005840"/>
-            <a:ext cx="7802575" cy="731520"/>
+            <a:off x="5349240" y="6089904"/>
+            <a:ext cx="6659575" cy="347472"/>
           </a:xfrm>
           <a:prstGeom prst="rect">
             <a:avLst/>
@@ -13833,142 +14048,24 @@
           <a:ln/>
         </p:spPr>
         <p:txBody>
-          <a:bodyPr wrap="square" lIns="0" tIns="0" rIns="0" bIns="0" rtlCol="0" anchor="ctr">
-            <a:normAutofit/>
-          </a:bodyPr>
+          <a:bodyPr wrap="square" lIns="0" tIns="0" rIns="0" bIns="0" rtlCol="0" anchor="ctr"/>
           <a:lstStyle/>
           <a:p>
             <a:pPr algn="ctr" indent="0" marL="0">
               <a:buNone/>
             </a:pPr>
             <a:r>
-              <a:rPr lang="en-US" sz="3600" b="1" dirty="0">
-                <a:solidFill>
-                  <a:srgbClr val="990011"/>
+              <a:rPr lang="en-US" sz="1600" i="1" dirty="0">
+                <a:solidFill>
+                  <a:srgbClr val="555555"/>
                 </a:solidFill>
                 <a:latin typeface="Times New Roman" pitchFamily="34" charset="0"/>
                 <a:ea typeface="Times New Roman" pitchFamily="34" charset="-122"/>
                 <a:cs typeface="Times New Roman" pitchFamily="34" charset="-120"/>
               </a:rPr>
-              <a:t>1. Location and Size</a:t>
-            </a:r>
-            <a:endParaRPr lang="en-US" sz="3600" dirty="0"/>
-          </a:p>
-        </p:txBody>
-      </p:sp>
-      <p:sp>
-        <p:nvSpPr>
-          <p:cNvPr id="5" name="Text 2"/>
-          <p:cNvSpPr/>
-          <p:nvPr/>
-        </p:nvSpPr>
-        <p:spPr>
-          <a:xfrm>
-            <a:off x="4069080" y="1783080"/>
-            <a:ext cx="7802575" cy="4663440"/>
-          </a:xfrm>
-          <a:prstGeom prst="rect">
-            <a:avLst/>
-          </a:prstGeom>
-          <a:noFill/>
-          <a:ln/>
-        </p:spPr>
-        <p:txBody>
-          <a:bodyPr wrap="square" lIns="0" tIns="0" rIns="0" bIns="0" rtlCol="0" anchor="t"/>
-          <a:lstStyle/>
-          <a:p>
-            <a:pPr algn="l" indent="0" marL="0">
-              <a:spcAft>
-                <a:spcPts val="800"/>
-              </a:spcAft>
-              <a:buNone/>
-            </a:pPr>
-            <a:r>
-              <a:rPr lang="en-US" sz="4000" i="1" dirty="0">
-                <a:solidFill>
-                  <a:srgbClr val="111111"/>
-                </a:solidFill>
-                <a:latin typeface="Times New Roman" pitchFamily="34" charset="0"/>
-                <a:ea typeface="Times New Roman" pitchFamily="34" charset="-122"/>
-                <a:cs typeface="Times New Roman" pitchFamily="34" charset="-120"/>
-              </a:rPr>
-              <a:t>Africa is located as follows:</a:t>
-            </a:r>
-            <a:endParaRPr lang="en-US" sz="4000" dirty="0"/>
-          </a:p>
-          <a:p>
-            <a:pPr algn="l" indent="0" marL="0">
-              <a:spcAft>
-                <a:spcPts val="800"/>
-              </a:spcAft>
-              <a:buNone/>
-            </a:pPr>
-            <a:r>
-              <a:rPr lang="en-US" sz="4000" b="1" dirty="0">
-                <a:solidFill>
-                  <a:srgbClr val="111111"/>
-                </a:solidFill>
-                <a:latin typeface="Times New Roman" pitchFamily="34" charset="0"/>
-                <a:ea typeface="Times New Roman" pitchFamily="34" charset="-122"/>
-                <a:cs typeface="Times New Roman" pitchFamily="34" charset="-120"/>
-              </a:rPr>
-              <a:t>Seas and oceans: </a:t>
-            </a:r>
-            <a:pPr algn="l" indent="0" marL="0">
-              <a:spcAft>
-                <a:spcPts val="800"/>
-              </a:spcAft>
-              <a:buNone/>
-            </a:pPr>
-            <a:r>
-              <a:rPr lang="en-US" sz="4000" dirty="0">
-                <a:solidFill>
-                  <a:srgbClr val="111111"/>
-                </a:solidFill>
-                <a:latin typeface="Times New Roman" pitchFamily="34" charset="0"/>
-                <a:ea typeface="Times New Roman" pitchFamily="34" charset="-122"/>
-                <a:cs typeface="Times New Roman" pitchFamily="34" charset="-120"/>
-              </a:rPr>
-              <a:t>Africa is surrounded by the Atlantic Ocean, the Indian Ocean, the Mediterranean Sea and the Red Sea.</a:t>
-            </a:r>
-            <a:endParaRPr lang="en-US" sz="4000" dirty="0"/>
-          </a:p>
-          <a:p>
-            <a:pPr algn="l" indent="0" marL="0">
-              <a:spcAft>
-                <a:spcPts val="800"/>
-              </a:spcAft>
-              <a:buNone/>
-            </a:pPr>
-            <a:r>
-              <a:rPr lang="en-US" sz="4000" b="1" dirty="0">
-                <a:solidFill>
-                  <a:srgbClr val="111111"/>
-                </a:solidFill>
-                <a:latin typeface="Times New Roman" pitchFamily="34" charset="0"/>
-                <a:ea typeface="Times New Roman" pitchFamily="34" charset="-122"/>
-                <a:cs typeface="Times New Roman" pitchFamily="34" charset="-120"/>
-              </a:rPr>
-              <a:t>The Equator: </a:t>
-            </a:r>
-            <a:pPr algn="l" indent="0" marL="0">
-              <a:spcAft>
-                <a:spcPts val="800"/>
-              </a:spcAft>
-              <a:buNone/>
-            </a:pPr>
-            <a:r>
-              <a:rPr lang="en-US" sz="4000" dirty="0">
-                <a:solidFill>
-                  <a:srgbClr val="111111"/>
-                </a:solidFill>
-                <a:latin typeface="Times New Roman" pitchFamily="34" charset="0"/>
-                <a:ea typeface="Times New Roman" pitchFamily="34" charset="-122"/>
-                <a:cs typeface="Times New Roman" pitchFamily="34" charset="-120"/>
-              </a:rPr>
-              <a:t>The Equator crosses the middle of Africa.</a:t>
-            </a:r>
-            <a:endParaRPr lang="en-US" sz="4000" dirty="0"/>
+              <a:t>Illustration: Africa and the seas around it</a:t>
+            </a:r>
+            <a:endParaRPr lang="en-US" sz="1600" dirty="0"/>
           </a:p>
         </p:txBody>
       </p:sp>
@@ -14101,7 +14198,7 @@
         <p:spPr>
           <a:xfrm>
             <a:off x="0" y="658368"/>
-            <a:ext cx="5120640" cy="5833872"/>
+            <a:ext cx="3840480" cy="5833872"/>
           </a:xfrm>
           <a:prstGeom prst="rect">
             <a:avLst/>
@@ -14116,8 +14213,8 @@
         </p:nvSpPr>
         <p:spPr>
           <a:xfrm>
-            <a:off x="5349240" y="1005840"/>
-            <a:ext cx="6522415" cy="731520"/>
+            <a:off x="4069080" y="1005840"/>
+            <a:ext cx="7802575" cy="731520"/>
           </a:xfrm>
           <a:prstGeom prst="rect">
             <a:avLst/>
@@ -14143,7 +14240,7 @@
                 <a:ea typeface="Times New Roman" pitchFamily="34" charset="-122"/>
                 <a:cs typeface="Times New Roman" pitchFamily="34" charset="-120"/>
               </a:rPr>
-              <a:t>1. Location and Size (continued)</a:t>
+              <a:t>1. Location</a:t>
             </a:r>
             <a:endParaRPr lang="en-US" sz="3600" dirty="0"/>
           </a:p>
@@ -14157,8 +14254,8 @@
         </p:nvSpPr>
         <p:spPr>
           <a:xfrm>
-            <a:off x="5349240" y="1783080"/>
-            <a:ext cx="6522415" cy="4663440"/>
+            <a:off x="4069080" y="1783080"/>
+            <a:ext cx="7802575" cy="4663440"/>
           </a:xfrm>
           <a:prstGeom prst="rect">
             <a:avLst/>
@@ -14170,11 +14267,12 @@
           <a:bodyPr wrap="square" lIns="0" tIns="0" rIns="0" bIns="0" rtlCol="0" anchor="t"/>
           <a:lstStyle/>
           <a:p>
-            <a:pPr algn="l" indent="0" marL="0">
+            <a:pPr algn="l" marL="342900" indent="-342900">
               <a:spcAft>
                 <a:spcPts val="800"/>
               </a:spcAft>
-              <a:buNone/>
+              <a:buSzPct val="100000"/>
+              <a:buChar char="•"/>
             </a:pPr>
             <a:r>
               <a:rPr lang="en-US" sz="4000" b="1" dirty="0">
@@ -14185,13 +14283,14 @@
                 <a:ea typeface="Times New Roman" pitchFamily="34" charset="-122"/>
                 <a:cs typeface="Times New Roman" pitchFamily="34" charset="-120"/>
               </a:rPr>
-              <a:t>Neighbours: </a:t>
-            </a:r>
-            <a:pPr algn="l" indent="0" marL="0">
+              <a:t>Longitudes: </a:t>
+            </a:r>
+            <a:pPr algn="l" marL="342900" indent="-342900">
               <a:spcAft>
                 <a:spcPts val="800"/>
               </a:spcAft>
-              <a:buNone/>
+              <a:buSzPct val="100000"/>
+              <a:buChar char="•"/>
             </a:pPr>
             <a:r>
               <a:rPr lang="en-US" sz="4000" dirty="0">
@@ -14202,16 +14301,56 @@
                 <a:ea typeface="Times New Roman" pitchFamily="34" charset="-122"/>
                 <a:cs typeface="Times New Roman" pitchFamily="34" charset="-120"/>
               </a:rPr>
-              <a:t>Africa is close to Europe at Gibraltar and joined to Asia at Suez.</a:t>
+              <a:t>From about 17° W to 51° E.</a:t>
             </a:r>
             <a:endParaRPr lang="en-US" sz="4000" dirty="0"/>
           </a:p>
           <a:p>
-            <a:pPr algn="l" indent="0" marL="0">
+            <a:pPr algn="l" marL="342900" indent="-342900">
               <a:spcAft>
                 <a:spcPts val="800"/>
               </a:spcAft>
-              <a:buNone/>
+              <a:buSzPct val="100000"/>
+              <a:buChar char="•"/>
+            </a:pPr>
+            <a:r>
+              <a:rPr lang="en-US" sz="4000" b="1" dirty="0">
+                <a:solidFill>
+                  <a:srgbClr val="111111"/>
+                </a:solidFill>
+                <a:latin typeface="Times New Roman" pitchFamily="34" charset="0"/>
+                <a:ea typeface="Times New Roman" pitchFamily="34" charset="-122"/>
+                <a:cs typeface="Times New Roman" pitchFamily="34" charset="-120"/>
+              </a:rPr>
+              <a:t>Oceans and seas: </a:t>
+            </a:r>
+            <a:pPr algn="l" marL="342900" indent="-342900">
+              <a:spcAft>
+                <a:spcPts val="800"/>
+              </a:spcAft>
+              <a:buSzPct val="100000"/>
+              <a:buChar char="•"/>
+            </a:pPr>
+            <a:r>
+              <a:rPr lang="en-US" sz="4000" dirty="0">
+                <a:solidFill>
+                  <a:srgbClr val="111111"/>
+                </a:solidFill>
+                <a:latin typeface="Times New Roman" pitchFamily="34" charset="0"/>
+                <a:ea typeface="Times New Roman" pitchFamily="34" charset="-122"/>
+                <a:cs typeface="Times New Roman" pitchFamily="34" charset="-120"/>
+              </a:rPr>
+              <a:t>Atlantic Ocean, Indian Ocean, Mediterranean Sea and Red Sea.</a:t>
+            </a:r>
+            <a:endParaRPr lang="en-US" sz="4000" dirty="0"/>
+          </a:p>
+          <a:p>
+            <a:pPr algn="l" marL="342900" indent="-342900">
+              <a:spcAft>
+                <a:spcPts val="800"/>
+              </a:spcAft>
+              <a:buSzPct val="100000"/>
+              <a:buChar char="•"/>
             </a:pPr>
             <a:r>
               <a:rPr lang="en-US" sz="4000" b="1" dirty="0">
@@ -14224,11 +14363,12 @@
               </a:rPr>
               <a:t>Size: </a:t>
             </a:r>
-            <a:pPr algn="l" indent="0" marL="0">
+            <a:pPr algn="l" marL="342900" indent="-342900">
               <a:spcAft>
                 <a:spcPts val="800"/>
               </a:spcAft>
-              <a:buNone/>
+              <a:buSzPct val="100000"/>
+              <a:buChar char="•"/>
             </a:pPr>
             <a:r>
               <a:rPr lang="en-US" sz="4000" dirty="0">
@@ -14239,7 +14379,7 @@
                 <a:ea typeface="Times New Roman" pitchFamily="34" charset="-122"/>
                 <a:cs typeface="Times New Roman" pitchFamily="34" charset="-120"/>
               </a:rPr>
-              <a:t>Africa covers about 30 million km² and has 54 countries.</a:t>
+              <a:t>About 30 million km², the second largest continent.</a:t>
             </a:r>
             <a:endParaRPr lang="en-US" sz="4000" dirty="0"/>
           </a:p>
@@ -14357,48 +14497,9 @@
           </a:p>
         </p:txBody>
       </p:sp>
-      <p:sp>
-        <p:nvSpPr>
-          <p:cNvPr id="3" name="Text 1"/>
-          <p:cNvSpPr/>
-          <p:nvPr/>
-        </p:nvSpPr>
-        <p:spPr>
-          <a:xfrm>
-            <a:off x="457200" y="1005840"/>
-            <a:ext cx="11277295" cy="731520"/>
-          </a:xfrm>
-          <a:prstGeom prst="rect">
-            <a:avLst/>
-          </a:prstGeom>
-          <a:noFill/>
-          <a:ln/>
-        </p:spPr>
-        <p:txBody>
-          <a:bodyPr wrap="square" lIns="0" tIns="0" rIns="0" bIns="0" rtlCol="0" anchor="ctr"/>
-          <a:lstStyle/>
-          <a:p>
-            <a:pPr algn="ctr" indent="0" marL="0">
-              <a:buNone/>
-            </a:pPr>
-            <a:r>
-              <a:rPr lang="en-US" sz="3600" b="1" dirty="0">
-                <a:solidFill>
-                  <a:srgbClr val="990011"/>
-                </a:solidFill>
-                <a:latin typeface="Times New Roman" pitchFamily="34" charset="0"/>
-                <a:ea typeface="Times New Roman" pitchFamily="34" charset="-122"/>
-                <a:cs typeface="Times New Roman" pitchFamily="34" charset="-120"/>
-              </a:rPr>
-              <a:t>1. Location and Size</a:t>
-            </a:r>
-            <a:endParaRPr lang="en-US" sz="3600" dirty="0"/>
-          </a:p>
-        </p:txBody>
-      </p:sp>
       <p:pic>
         <p:nvPicPr>
-          <p:cNvPr id="4" name="Image 0" descr="/home/claude/f4/img/v2/africa_location_big.png">    </p:cNvPr>
+          <p:cNvPr id="3" name="Image 0" descr="/home/claude/f4/img/minesec_sheet.png">    </p:cNvPr>
           <p:cNvPicPr>
             <a:picLocks noChangeAspect="1"/>
           </p:cNvPicPr>
@@ -14412,8 +14513,8 @@
         </p:blipFill>
         <p:spPr>
           <a:xfrm>
-            <a:off x="2300072" y="1783080"/>
-            <a:ext cx="7591552" cy="4270248"/>
+            <a:off x="0" y="658368"/>
+            <a:ext cx="5120640" cy="5833872"/>
           </a:xfrm>
           <a:prstGeom prst="rect">
             <a:avLst/>
@@ -14422,14 +14523,14 @@
       </p:pic>
       <p:sp>
         <p:nvSpPr>
-          <p:cNvPr id="5" name="Text 2"/>
+          <p:cNvPr id="4" name="Text 1"/>
           <p:cNvSpPr/>
           <p:nvPr/>
         </p:nvSpPr>
         <p:spPr>
           <a:xfrm>
-            <a:off x="457200" y="6089904"/>
-            <a:ext cx="11277295" cy="347472"/>
+            <a:off x="5349240" y="1005840"/>
+            <a:ext cx="6522415" cy="731520"/>
           </a:xfrm>
           <a:prstGeom prst="rect">
             <a:avLst/>
@@ -14438,24 +14539,87 @@
           <a:ln/>
         </p:spPr>
         <p:txBody>
-          <a:bodyPr wrap="square" lIns="0" tIns="0" rIns="0" bIns="0" rtlCol="0" anchor="ctr"/>
+          <a:bodyPr wrap="square" lIns="0" tIns="0" rIns="0" bIns="0" rtlCol="0" anchor="ctr">
+            <a:normAutofit/>
+          </a:bodyPr>
           <a:lstStyle/>
           <a:p>
             <a:pPr algn="ctr" indent="0" marL="0">
               <a:buNone/>
             </a:pPr>
             <a:r>
-              <a:rPr lang="en-US" sz="1800" i="1" dirty="0">
-                <a:solidFill>
-                  <a:srgbClr val="555555"/>
+              <a:rPr lang="en-US" sz="3600" b="1" dirty="0">
+                <a:solidFill>
+                  <a:srgbClr val="990011"/>
                 </a:solidFill>
                 <a:latin typeface="Times New Roman" pitchFamily="34" charset="0"/>
                 <a:ea typeface="Times New Roman" pitchFamily="34" charset="-122"/>
                 <a:cs typeface="Times New Roman" pitchFamily="34" charset="-120"/>
               </a:rPr>
-              <a:t>Illustration: location of Africa</a:t>
-            </a:r>
-            <a:endParaRPr lang="en-US" sz="1800" dirty="0"/>
+              <a:t>1. Location (continued)</a:t>
+            </a:r>
+            <a:endParaRPr lang="en-US" sz="3600" dirty="0"/>
+          </a:p>
+        </p:txBody>
+      </p:sp>
+      <p:sp>
+        <p:nvSpPr>
+          <p:cNvPr id="5" name="Text 2"/>
+          <p:cNvSpPr/>
+          <p:nvPr/>
+        </p:nvSpPr>
+        <p:spPr>
+          <a:xfrm>
+            <a:off x="5349240" y="1783080"/>
+            <a:ext cx="6522415" cy="4663440"/>
+          </a:xfrm>
+          <a:prstGeom prst="rect">
+            <a:avLst/>
+          </a:prstGeom>
+          <a:noFill/>
+          <a:ln/>
+        </p:spPr>
+        <p:txBody>
+          <a:bodyPr wrap="square" lIns="0" tIns="0" rIns="0" bIns="0" rtlCol="0" anchor="t"/>
+          <a:lstStyle/>
+          <a:p>
+            <a:pPr algn="l" marL="342900" indent="-342900">
+              <a:spcAft>
+                <a:spcPts val="800"/>
+              </a:spcAft>
+              <a:buSzPct val="100000"/>
+              <a:buChar char="•"/>
+            </a:pPr>
+            <a:r>
+              <a:rPr lang="en-US" sz="4000" b="1" dirty="0">
+                <a:solidFill>
+                  <a:srgbClr val="111111"/>
+                </a:solidFill>
+                <a:latin typeface="Times New Roman" pitchFamily="34" charset="0"/>
+                <a:ea typeface="Times New Roman" pitchFamily="34" charset="-122"/>
+                <a:cs typeface="Times New Roman" pitchFamily="34" charset="-120"/>
+              </a:rPr>
+              <a:t>Cameroon: </a:t>
+            </a:r>
+            <a:pPr algn="l" marL="342900" indent="-342900">
+              <a:spcAft>
+                <a:spcPts val="800"/>
+              </a:spcAft>
+              <a:buSzPct val="100000"/>
+              <a:buChar char="•"/>
+            </a:pPr>
+            <a:r>
+              <a:rPr lang="en-US" sz="4000" dirty="0">
+                <a:solidFill>
+                  <a:srgbClr val="111111"/>
+                </a:solidFill>
+                <a:latin typeface="Times New Roman" pitchFamily="34" charset="0"/>
+                <a:ea typeface="Times New Roman" pitchFamily="34" charset="-122"/>
+                <a:cs typeface="Times New Roman" pitchFamily="34" charset="-120"/>
+              </a:rPr>
+              <a:t>In Central Africa, on the Gulf of Guinea.</a:t>
+            </a:r>
+            <a:endParaRPr lang="en-US" sz="4000" dirty="0"/>
           </a:p>
         </p:txBody>
       </p:sp>
@@ -14571,9 +14735,131 @@
           </a:p>
         </p:txBody>
       </p:sp>
+      <p:sp>
+        <p:nvSpPr>
+          <p:cNvPr id="3" name="Text 1"/>
+          <p:cNvSpPr/>
+          <p:nvPr/>
+        </p:nvSpPr>
+        <p:spPr>
+          <a:xfrm>
+            <a:off x="365760" y="1005840"/>
+            <a:ext cx="11460175" cy="731520"/>
+          </a:xfrm>
+          <a:prstGeom prst="rect">
+            <a:avLst/>
+          </a:prstGeom>
+          <a:noFill/>
+          <a:ln/>
+        </p:spPr>
+        <p:txBody>
+          <a:bodyPr wrap="square" lIns="0" tIns="0" rIns="0" bIns="0" rtlCol="0" anchor="ctr">
+            <a:normAutofit/>
+          </a:bodyPr>
+          <a:lstStyle/>
+          <a:p>
+            <a:pPr algn="ctr" indent="0" marL="0">
+              <a:buNone/>
+            </a:pPr>
+            <a:r>
+              <a:rPr lang="en-US" sz="3600" b="1" dirty="0">
+                <a:solidFill>
+                  <a:srgbClr val="990011"/>
+                </a:solidFill>
+                <a:latin typeface="Times New Roman" pitchFamily="34" charset="0"/>
+                <a:ea typeface="Times New Roman" pitchFamily="34" charset="-122"/>
+                <a:cs typeface="Times New Roman" pitchFamily="34" charset="-120"/>
+              </a:rPr>
+              <a:t>2. Physical Characteristics</a:t>
+            </a:r>
+            <a:endParaRPr lang="en-US" sz="3600" dirty="0"/>
+          </a:p>
+        </p:txBody>
+      </p:sp>
+      <p:sp>
+        <p:nvSpPr>
+          <p:cNvPr id="4" name="Text 2"/>
+          <p:cNvSpPr/>
+          <p:nvPr/>
+        </p:nvSpPr>
+        <p:spPr>
+          <a:xfrm>
+            <a:off x="365760" y="1783080"/>
+            <a:ext cx="4846320" cy="4617720"/>
+          </a:xfrm>
+          <a:prstGeom prst="rect">
+            <a:avLst/>
+          </a:prstGeom>
+          <a:noFill/>
+          <a:ln/>
+        </p:spPr>
+        <p:txBody>
+          <a:bodyPr wrap="square" lIns="0" tIns="0" rIns="0" bIns="0" rtlCol="0" anchor="t"/>
+          <a:lstStyle/>
+          <a:p>
+            <a:pPr algn="l" indent="0" marL="0">
+              <a:spcAft>
+                <a:spcPts val="800"/>
+              </a:spcAft>
+              <a:buNone/>
+            </a:pPr>
+            <a:r>
+              <a:rPr lang="en-US" sz="3600" i="1" dirty="0">
+                <a:solidFill>
+                  <a:srgbClr val="111111"/>
+                </a:solidFill>
+                <a:latin typeface="Times New Roman" pitchFamily="34" charset="0"/>
+                <a:ea typeface="Times New Roman" pitchFamily="34" charset="-122"/>
+                <a:cs typeface="Times New Roman" pitchFamily="34" charset="-120"/>
+              </a:rPr>
+              <a:t>Africa has the following physical characteristics:</a:t>
+            </a:r>
+            <a:endParaRPr lang="en-US" sz="3600" dirty="0"/>
+          </a:p>
+          <a:p>
+            <a:pPr algn="l" marL="342900" indent="-342900">
+              <a:spcAft>
+                <a:spcPts val="800"/>
+              </a:spcAft>
+              <a:buSzPct val="100000"/>
+              <a:buChar char="•"/>
+            </a:pPr>
+            <a:r>
+              <a:rPr lang="en-US" sz="3600" b="1" dirty="0">
+                <a:solidFill>
+                  <a:srgbClr val="111111"/>
+                </a:solidFill>
+                <a:latin typeface="Times New Roman" pitchFamily="34" charset="0"/>
+                <a:ea typeface="Times New Roman" pitchFamily="34" charset="-122"/>
+                <a:cs typeface="Times New Roman" pitchFamily="34" charset="-120"/>
+              </a:rPr>
+              <a:t>A high plateau: </a:t>
+            </a:r>
+            <a:pPr algn="l" marL="342900" indent="-342900">
+              <a:spcAft>
+                <a:spcPts val="800"/>
+              </a:spcAft>
+              <a:buSzPct val="100000"/>
+              <a:buChar char="•"/>
+            </a:pPr>
+            <a:r>
+              <a:rPr lang="en-US" sz="3600" dirty="0">
+                <a:solidFill>
+                  <a:srgbClr val="111111"/>
+                </a:solidFill>
+                <a:latin typeface="Times New Roman" pitchFamily="34" charset="0"/>
+                <a:ea typeface="Times New Roman" pitchFamily="34" charset="-122"/>
+                <a:cs typeface="Times New Roman" pitchFamily="34" charset="-120"/>
+              </a:rPr>
+              <a:t>Most of Africa is a high plateau.</a:t>
+            </a:r>
+            <a:endParaRPr lang="en-US" sz="3600" dirty="0"/>
+          </a:p>
+        </p:txBody>
+      </p:sp>
       <p:pic>
         <p:nvPicPr>
-          <p:cNvPr id="3" name="Image 0" descr="/home/claude/f4/img/minesec_sheet.png">    </p:cNvPr>
+          <p:cNvPr id="5" name="Image 0" descr="/home/claude/f4/img/v2/africa_plateau_big.png">    </p:cNvPr>
           <p:cNvPicPr>
             <a:picLocks noChangeAspect="1"/>
           </p:cNvPicPr>
@@ -14587,8 +14873,8 @@
         </p:blipFill>
         <p:spPr>
           <a:xfrm>
-            <a:off x="0" y="658368"/>
-            <a:ext cx="3840480" cy="5833872"/>
+            <a:off x="5349240" y="2617506"/>
+            <a:ext cx="6659575" cy="2601397"/>
           </a:xfrm>
           <a:prstGeom prst="rect">
             <a:avLst/>
@@ -14597,14 +14883,14 @@
       </p:pic>
       <p:sp>
         <p:nvSpPr>
-          <p:cNvPr id="4" name="Text 1"/>
+          <p:cNvPr id="6" name="Text 3"/>
           <p:cNvSpPr/>
           <p:nvPr/>
         </p:nvSpPr>
         <p:spPr>
           <a:xfrm>
-            <a:off x="4069080" y="1005840"/>
-            <a:ext cx="7802575" cy="731520"/>
+            <a:off x="5349240" y="6089904"/>
+            <a:ext cx="6659575" cy="347472"/>
           </a:xfrm>
           <a:prstGeom prst="rect">
             <a:avLst/>
@@ -14613,142 +14899,24 @@
           <a:ln/>
         </p:spPr>
         <p:txBody>
-          <a:bodyPr wrap="square" lIns="0" tIns="0" rIns="0" bIns="0" rtlCol="0" anchor="ctr">
-            <a:normAutofit/>
-          </a:bodyPr>
+          <a:bodyPr wrap="square" lIns="0" tIns="0" rIns="0" bIns="0" rtlCol="0" anchor="ctr"/>
           <a:lstStyle/>
           <a:p>
             <a:pPr algn="ctr" indent="0" marL="0">
               <a:buNone/>
             </a:pPr>
             <a:r>
-              <a:rPr lang="en-US" sz="3600" b="1" dirty="0">
-                <a:solidFill>
-                  <a:srgbClr val="990011"/>
+              <a:rPr lang="en-US" sz="1600" i="1" dirty="0">
+                <a:solidFill>
+                  <a:srgbClr val="555555"/>
                 </a:solidFill>
                 <a:latin typeface="Times New Roman" pitchFamily="34" charset="0"/>
                 <a:ea typeface="Times New Roman" pitchFamily="34" charset="-122"/>
                 <a:cs typeface="Times New Roman" pitchFamily="34" charset="-120"/>
               </a:rPr>
-              <a:t>2. Physical Characteristics</a:t>
-            </a:r>
-            <a:endParaRPr lang="en-US" sz="3600" dirty="0"/>
-          </a:p>
-        </p:txBody>
-      </p:sp>
-      <p:sp>
-        <p:nvSpPr>
-          <p:cNvPr id="5" name="Text 2"/>
-          <p:cNvSpPr/>
-          <p:nvPr/>
-        </p:nvSpPr>
-        <p:spPr>
-          <a:xfrm>
-            <a:off x="4069080" y="1783080"/>
-            <a:ext cx="7802575" cy="4663440"/>
-          </a:xfrm>
-          <a:prstGeom prst="rect">
-            <a:avLst/>
-          </a:prstGeom>
-          <a:noFill/>
-          <a:ln/>
-        </p:spPr>
-        <p:txBody>
-          <a:bodyPr wrap="square" lIns="0" tIns="0" rIns="0" bIns="0" rtlCol="0" anchor="t"/>
-          <a:lstStyle/>
-          <a:p>
-            <a:pPr algn="l" indent="0" marL="0">
-              <a:spcAft>
-                <a:spcPts val="800"/>
-              </a:spcAft>
-              <a:buNone/>
-            </a:pPr>
-            <a:r>
-              <a:rPr lang="en-US" sz="4000" i="1" dirty="0">
-                <a:solidFill>
-                  <a:srgbClr val="111111"/>
-                </a:solidFill>
-                <a:latin typeface="Times New Roman" pitchFamily="34" charset="0"/>
-                <a:ea typeface="Times New Roman" pitchFamily="34" charset="-122"/>
-                <a:cs typeface="Times New Roman" pitchFamily="34" charset="-120"/>
-              </a:rPr>
-              <a:t>Africa has the following physical characteristics:</a:t>
-            </a:r>
-            <a:endParaRPr lang="en-US" sz="4000" dirty="0"/>
-          </a:p>
-          <a:p>
-            <a:pPr algn="l" indent="0" marL="0">
-              <a:spcAft>
-                <a:spcPts val="800"/>
-              </a:spcAft>
-              <a:buNone/>
-            </a:pPr>
-            <a:r>
-              <a:rPr lang="en-US" sz="4000" b="1" dirty="0">
-                <a:solidFill>
-                  <a:srgbClr val="111111"/>
-                </a:solidFill>
-                <a:latin typeface="Times New Roman" pitchFamily="34" charset="0"/>
-                <a:ea typeface="Times New Roman" pitchFamily="34" charset="-122"/>
-                <a:cs typeface="Times New Roman" pitchFamily="34" charset="-120"/>
-              </a:rPr>
-              <a:t>A plateau continent: </a:t>
-            </a:r>
-            <a:pPr algn="l" indent="0" marL="0">
-              <a:spcAft>
-                <a:spcPts val="800"/>
-              </a:spcAft>
-              <a:buNone/>
-            </a:pPr>
-            <a:r>
-              <a:rPr lang="en-US" sz="4000" dirty="0">
-                <a:solidFill>
-                  <a:srgbClr val="111111"/>
-                </a:solidFill>
-                <a:latin typeface="Times New Roman" pitchFamily="34" charset="0"/>
-                <a:ea typeface="Times New Roman" pitchFamily="34" charset="-122"/>
-                <a:cs typeface="Times New Roman" pitchFamily="34" charset="-120"/>
-              </a:rPr>
-              <a:t>Most of Africa is a high and flat plateau.</a:t>
-            </a:r>
-            <a:endParaRPr lang="en-US" sz="4000" dirty="0"/>
-          </a:p>
-          <a:p>
-            <a:pPr algn="l" indent="0" marL="0">
-              <a:spcAft>
-                <a:spcPts val="800"/>
-              </a:spcAft>
-              <a:buNone/>
-            </a:pPr>
-            <a:r>
-              <a:rPr lang="en-US" sz="4000" b="1" dirty="0">
-                <a:solidFill>
-                  <a:srgbClr val="111111"/>
-                </a:solidFill>
-                <a:latin typeface="Times New Roman" pitchFamily="34" charset="0"/>
-                <a:ea typeface="Times New Roman" pitchFamily="34" charset="-122"/>
-                <a:cs typeface="Times New Roman" pitchFamily="34" charset="-120"/>
-              </a:rPr>
-              <a:t>Highest point: </a:t>
-            </a:r>
-            <a:pPr algn="l" indent="0" marL="0">
-              <a:spcAft>
-                <a:spcPts val="800"/>
-              </a:spcAft>
-              <a:buNone/>
-            </a:pPr>
-            <a:r>
-              <a:rPr lang="en-US" sz="4000" dirty="0">
-                <a:solidFill>
-                  <a:srgbClr val="111111"/>
-                </a:solidFill>
-                <a:latin typeface="Times New Roman" pitchFamily="34" charset="0"/>
-                <a:ea typeface="Times New Roman" pitchFamily="34" charset="-122"/>
-                <a:cs typeface="Times New Roman" pitchFamily="34" charset="-120"/>
-              </a:rPr>
-              <a:t>Mount Kilimanjaro, at 5,895 m, is the highest point of Africa.</a:t>
-            </a:r>
-            <a:endParaRPr lang="en-US" sz="4000" dirty="0"/>
+              <a:t>Illustration: the plateau of Africa</a:t>
+            </a:r>
+            <a:endParaRPr lang="en-US" sz="1600" dirty="0"/>
           </a:p>
         </p:txBody>
       </p:sp>
@@ -15103,9 +15271,111 @@
           </a:p>
         </p:txBody>
       </p:sp>
+      <p:sp>
+        <p:nvSpPr>
+          <p:cNvPr id="3" name="Text 1"/>
+          <p:cNvSpPr/>
+          <p:nvPr/>
+        </p:nvSpPr>
+        <p:spPr>
+          <a:xfrm>
+            <a:off x="365760" y="1005840"/>
+            <a:ext cx="11460175" cy="731520"/>
+          </a:xfrm>
+          <a:prstGeom prst="rect">
+            <a:avLst/>
+          </a:prstGeom>
+          <a:noFill/>
+          <a:ln/>
+        </p:spPr>
+        <p:txBody>
+          <a:bodyPr wrap="square" lIns="0" tIns="0" rIns="0" bIns="0" rtlCol="0" anchor="ctr">
+            <a:normAutofit/>
+          </a:bodyPr>
+          <a:lstStyle/>
+          <a:p>
+            <a:pPr algn="ctr" indent="0" marL="0">
+              <a:buNone/>
+            </a:pPr>
+            <a:r>
+              <a:rPr lang="en-US" sz="3600" b="1" dirty="0">
+                <a:solidFill>
+                  <a:srgbClr val="990011"/>
+                </a:solidFill>
+                <a:latin typeface="Times New Roman" pitchFamily="34" charset="0"/>
+                <a:ea typeface="Times New Roman" pitchFamily="34" charset="-122"/>
+                <a:cs typeface="Times New Roman" pitchFamily="34" charset="-120"/>
+              </a:rPr>
+              <a:t>2. Physical Characteristics</a:t>
+            </a:r>
+            <a:endParaRPr lang="en-US" sz="3600" dirty="0"/>
+          </a:p>
+        </p:txBody>
+      </p:sp>
+      <p:sp>
+        <p:nvSpPr>
+          <p:cNvPr id="4" name="Text 2"/>
+          <p:cNvSpPr/>
+          <p:nvPr/>
+        </p:nvSpPr>
+        <p:spPr>
+          <a:xfrm>
+            <a:off x="365760" y="1783080"/>
+            <a:ext cx="4846320" cy="4617720"/>
+          </a:xfrm>
+          <a:prstGeom prst="rect">
+            <a:avLst/>
+          </a:prstGeom>
+          <a:noFill/>
+          <a:ln/>
+        </p:spPr>
+        <p:txBody>
+          <a:bodyPr wrap="square" lIns="0" tIns="0" rIns="0" bIns="0" rtlCol="0" anchor="t"/>
+          <a:lstStyle/>
+          <a:p>
+            <a:pPr algn="l" marL="342900" indent="-342900">
+              <a:spcAft>
+                <a:spcPts val="800"/>
+              </a:spcAft>
+              <a:buSzPct val="100000"/>
+              <a:buChar char="•"/>
+            </a:pPr>
+            <a:r>
+              <a:rPr lang="en-US" sz="3600" b="1" dirty="0">
+                <a:solidFill>
+                  <a:srgbClr val="111111"/>
+                </a:solidFill>
+                <a:latin typeface="Times New Roman" pitchFamily="34" charset="0"/>
+                <a:ea typeface="Times New Roman" pitchFamily="34" charset="-122"/>
+                <a:cs typeface="Times New Roman" pitchFamily="34" charset="-120"/>
+              </a:rPr>
+              <a:t>High mountains: </a:t>
+            </a:r>
+            <a:pPr algn="l" marL="342900" indent="-342900">
+              <a:spcAft>
+                <a:spcPts val="800"/>
+              </a:spcAft>
+              <a:buSzPct val="100000"/>
+              <a:buChar char="•"/>
+            </a:pPr>
+            <a:r>
+              <a:rPr lang="en-US" sz="3600" dirty="0">
+                <a:solidFill>
+                  <a:srgbClr val="111111"/>
+                </a:solidFill>
+                <a:latin typeface="Times New Roman" pitchFamily="34" charset="0"/>
+                <a:ea typeface="Times New Roman" pitchFamily="34" charset="-122"/>
+                <a:cs typeface="Times New Roman" pitchFamily="34" charset="-120"/>
+              </a:rPr>
+              <a:t>Kilimanjaro (5,895 m) is the highest.</a:t>
+            </a:r>
+            <a:endParaRPr lang="en-US" sz="3600" dirty="0"/>
+          </a:p>
+        </p:txBody>
+      </p:sp>
       <p:pic>
         <p:nvPicPr>
-          <p:cNvPr id="3" name="Image 0" descr="/home/claude/f4/img/minesec_sheet.png">    </p:cNvPr>
+          <p:cNvPr id="5" name="Image 0" descr="/home/claude/f4/img/v2/f2t_kilimanjaro.jpg">    </p:cNvPr>
           <p:cNvPicPr>
             <a:picLocks noChangeAspect="1"/>
           </p:cNvPicPr>
@@ -15119,8 +15389,8 @@
         </p:blipFill>
         <p:spPr>
           <a:xfrm>
-            <a:off x="0" y="658368"/>
-            <a:ext cx="5120640" cy="5833872"/>
+            <a:off x="5349240" y="2071212"/>
+            <a:ext cx="6659575" cy="3693983"/>
           </a:xfrm>
           <a:prstGeom prst="rect">
             <a:avLst/>
@@ -15129,14 +15399,14 @@
       </p:pic>
       <p:sp>
         <p:nvSpPr>
-          <p:cNvPr id="4" name="Text 1"/>
+          <p:cNvPr id="6" name="Text 3"/>
           <p:cNvSpPr/>
           <p:nvPr/>
         </p:nvSpPr>
         <p:spPr>
           <a:xfrm>
-            <a:off x="5349240" y="1005840"/>
-            <a:ext cx="6522415" cy="731520"/>
+            <a:off x="5349240" y="6089904"/>
+            <a:ext cx="6659575" cy="347472"/>
           </a:xfrm>
           <a:prstGeom prst="rect">
             <a:avLst/>
@@ -15145,122 +15415,24 @@
           <a:ln/>
         </p:spPr>
         <p:txBody>
-          <a:bodyPr wrap="square" lIns="0" tIns="0" rIns="0" bIns="0" rtlCol="0" anchor="ctr">
-            <a:normAutofit/>
-          </a:bodyPr>
+          <a:bodyPr wrap="square" lIns="0" tIns="0" rIns="0" bIns="0" rtlCol="0" anchor="ctr"/>
           <a:lstStyle/>
           <a:p>
             <a:pPr algn="ctr" indent="0" marL="0">
               <a:buNone/>
             </a:pPr>
             <a:r>
-              <a:rPr lang="en-US" sz="3600" b="1" dirty="0">
-                <a:solidFill>
-                  <a:srgbClr val="990011"/>
+              <a:rPr lang="en-US" sz="1600" i="1" dirty="0">
+                <a:solidFill>
+                  <a:srgbClr val="555555"/>
                 </a:solidFill>
                 <a:latin typeface="Times New Roman" pitchFamily="34" charset="0"/>
                 <a:ea typeface="Times New Roman" pitchFamily="34" charset="-122"/>
                 <a:cs typeface="Times New Roman" pitchFamily="34" charset="-120"/>
               </a:rPr>
-              <a:t>2. Physical Characteristics (continued)</a:t>
-            </a:r>
-            <a:endParaRPr lang="en-US" sz="3600" dirty="0"/>
-          </a:p>
-        </p:txBody>
-      </p:sp>
-      <p:sp>
-        <p:nvSpPr>
-          <p:cNvPr id="5" name="Text 2"/>
-          <p:cNvSpPr/>
-          <p:nvPr/>
-        </p:nvSpPr>
-        <p:spPr>
-          <a:xfrm>
-            <a:off x="5349240" y="1783080"/>
-            <a:ext cx="6522415" cy="4663440"/>
-          </a:xfrm>
-          <a:prstGeom prst="rect">
-            <a:avLst/>
-          </a:prstGeom>
-          <a:noFill/>
-          <a:ln/>
-        </p:spPr>
-        <p:txBody>
-          <a:bodyPr wrap="square" lIns="0" tIns="0" rIns="0" bIns="0" rtlCol="0" anchor="t"/>
-          <a:lstStyle/>
-          <a:p>
-            <a:pPr algn="l" indent="0" marL="0">
-              <a:spcAft>
-                <a:spcPts val="800"/>
-              </a:spcAft>
-              <a:buNone/>
-            </a:pPr>
-            <a:r>
-              <a:rPr lang="en-US" sz="4000" b="1" dirty="0">
-                <a:solidFill>
-                  <a:srgbClr val="111111"/>
-                </a:solidFill>
-                <a:latin typeface="Times New Roman" pitchFamily="34" charset="0"/>
-                <a:ea typeface="Times New Roman" pitchFamily="34" charset="-122"/>
-                <a:cs typeface="Times New Roman" pitchFamily="34" charset="-120"/>
-              </a:rPr>
-              <a:t>Longest river: </a:t>
-            </a:r>
-            <a:pPr algn="l" indent="0" marL="0">
-              <a:spcAft>
-                <a:spcPts val="800"/>
-              </a:spcAft>
-              <a:buNone/>
-            </a:pPr>
-            <a:r>
-              <a:rPr lang="en-US" sz="4000" dirty="0">
-                <a:solidFill>
-                  <a:srgbClr val="111111"/>
-                </a:solidFill>
-                <a:latin typeface="Times New Roman" pitchFamily="34" charset="0"/>
-                <a:ea typeface="Times New Roman" pitchFamily="34" charset="-122"/>
-                <a:cs typeface="Times New Roman" pitchFamily="34" charset="-120"/>
-              </a:rPr>
-              <a:t>The Nile is the longest river in Africa.</a:t>
-            </a:r>
-            <a:endParaRPr lang="en-US" sz="4000" dirty="0"/>
-          </a:p>
-          <a:p>
-            <a:pPr algn="l" indent="0" marL="0">
-              <a:spcAft>
-                <a:spcPts val="800"/>
-              </a:spcAft>
-              <a:buNone/>
-            </a:pPr>
-            <a:r>
-              <a:rPr lang="en-US" sz="4000" b="1" dirty="0">
-                <a:solidFill>
-                  <a:srgbClr val="111111"/>
-                </a:solidFill>
-                <a:latin typeface="Times New Roman" pitchFamily="34" charset="0"/>
-                <a:ea typeface="Times New Roman" pitchFamily="34" charset="-122"/>
-                <a:cs typeface="Times New Roman" pitchFamily="34" charset="-120"/>
-              </a:rPr>
-              <a:t>Coast: </a:t>
-            </a:r>
-            <a:pPr algn="l" indent="0" marL="0">
-              <a:spcAft>
-                <a:spcPts val="800"/>
-              </a:spcAft>
-              <a:buNone/>
-            </a:pPr>
-            <a:r>
-              <a:rPr lang="en-US" sz="4000" dirty="0">
-                <a:solidFill>
-                  <a:srgbClr val="111111"/>
-                </a:solidFill>
-                <a:latin typeface="Times New Roman" pitchFamily="34" charset="0"/>
-                <a:ea typeface="Times New Roman" pitchFamily="34" charset="-122"/>
-                <a:cs typeface="Times New Roman" pitchFamily="34" charset="-120"/>
-              </a:rPr>
-              <a:t>The coast is smooth, with few bays and few natural ports.</a:t>
-            </a:r>
-            <a:endParaRPr lang="en-US" sz="4000" dirty="0"/>
+              <a:t>Illustration: Kilimanjaro</a:t>
+            </a:r>
+            <a:endParaRPr lang="en-US" sz="1600" dirty="0"/>
           </a:p>
         </p:txBody>
       </p:sp>
@@ -15370,7 +15542,7 @@
                 <a:ea typeface="Calibri" pitchFamily="34" charset="-122"/>
                 <a:cs typeface="Calibri" pitchFamily="34" charset="-120"/>
               </a:rPr>
-              <a:t>FORMATIVE EVALUATION</a:t>
+              <a:t>BOARD SUMMARY</a:t>
             </a:r>
             <a:endParaRPr lang="en-US" sz="1400" dirty="0"/>
           </a:p>
@@ -15393,7 +15565,7 @@
         <p:spPr>
           <a:xfrm>
             <a:off x="0" y="658368"/>
-            <a:ext cx="5120640" cy="5833872"/>
+            <a:ext cx="3840480" cy="5833872"/>
           </a:xfrm>
           <a:prstGeom prst="rect">
             <a:avLst/>
@@ -15408,8 +15580,8 @@
         </p:nvSpPr>
         <p:spPr>
           <a:xfrm>
-            <a:off x="5349240" y="1005840"/>
-            <a:ext cx="6522415" cy="731520"/>
+            <a:off x="4069080" y="1005840"/>
+            <a:ext cx="7802575" cy="731520"/>
           </a:xfrm>
           <a:prstGeom prst="rect">
             <a:avLst/>
@@ -15435,7 +15607,7 @@
                 <a:ea typeface="Times New Roman" pitchFamily="34" charset="-122"/>
                 <a:cs typeface="Times New Roman" pitchFamily="34" charset="-120"/>
               </a:rPr>
-              <a:t>Evaluation 1</a:t>
+              <a:t>2. Physical Characteristics</a:t>
             </a:r>
             <a:endParaRPr lang="en-US" sz="3600" dirty="0"/>
           </a:p>
@@ -15449,8 +15621,8 @@
         </p:nvSpPr>
         <p:spPr>
           <a:xfrm>
-            <a:off x="5349240" y="1783080"/>
-            <a:ext cx="6522415" cy="4663440"/>
+            <a:off x="4069080" y="1783080"/>
+            <a:ext cx="7802575" cy="4663440"/>
           </a:xfrm>
           <a:prstGeom prst="rect">
             <a:avLst/>
@@ -15462,14 +15634,15 @@
           <a:bodyPr wrap="square" lIns="0" tIns="0" rIns="0" bIns="0" rtlCol="0" anchor="t"/>
           <a:lstStyle/>
           <a:p>
-            <a:pPr algn="l" indent="0" marL="0">
+            <a:pPr algn="l" marL="342900" indent="-342900">
               <a:spcAft>
                 <a:spcPts val="800"/>
               </a:spcAft>
-              <a:buNone/>
+              <a:buSzPct val="100000"/>
+              <a:buChar char="•"/>
             </a:pPr>
             <a:r>
-              <a:rPr lang="en-US" sz="4000" dirty="0">
+              <a:rPr lang="en-US" sz="4000" b="1" dirty="0">
                 <a:solidFill>
                   <a:srgbClr val="111111"/>
                 </a:solidFill>
@@ -15477,7 +15650,103 @@
                 <a:ea typeface="Times New Roman" pitchFamily="34" charset="-122"/>
                 <a:cs typeface="Times New Roman" pitchFamily="34" charset="-120"/>
               </a:rPr>
-              <a:t>Name the four seas and oceans around Africa.</a:t>
+              <a:t>Rift Valley: </a:t>
+            </a:r>
+            <a:pPr algn="l" marL="342900" indent="-342900">
+              <a:spcAft>
+                <a:spcPts val="800"/>
+              </a:spcAft>
+              <a:buSzPct val="100000"/>
+              <a:buChar char="•"/>
+            </a:pPr>
+            <a:r>
+              <a:rPr lang="en-US" sz="4000" dirty="0">
+                <a:solidFill>
+                  <a:srgbClr val="111111"/>
+                </a:solidFill>
+                <a:latin typeface="Times New Roman" pitchFamily="34" charset="0"/>
+                <a:ea typeface="Times New Roman" pitchFamily="34" charset="-122"/>
+                <a:cs typeface="Times New Roman" pitchFamily="34" charset="-120"/>
+              </a:rPr>
+              <a:t>A long valley in East Africa.</a:t>
+            </a:r>
+            <a:endParaRPr lang="en-US" sz="4000" dirty="0"/>
+          </a:p>
+          <a:p>
+            <a:pPr algn="l" marL="342900" indent="-342900">
+              <a:spcAft>
+                <a:spcPts val="800"/>
+              </a:spcAft>
+              <a:buSzPct val="100000"/>
+              <a:buChar char="•"/>
+            </a:pPr>
+            <a:r>
+              <a:rPr lang="en-US" sz="4000" b="1" dirty="0">
+                <a:solidFill>
+                  <a:srgbClr val="111111"/>
+                </a:solidFill>
+                <a:latin typeface="Times New Roman" pitchFamily="34" charset="0"/>
+                <a:ea typeface="Times New Roman" pitchFamily="34" charset="-122"/>
+                <a:cs typeface="Times New Roman" pitchFamily="34" charset="-120"/>
+              </a:rPr>
+              <a:t>Big rivers and lakes: </a:t>
+            </a:r>
+            <a:pPr algn="l" marL="342900" indent="-342900">
+              <a:spcAft>
+                <a:spcPts val="800"/>
+              </a:spcAft>
+              <a:buSzPct val="100000"/>
+              <a:buChar char="•"/>
+            </a:pPr>
+            <a:r>
+              <a:rPr lang="en-US" sz="4000" dirty="0">
+                <a:solidFill>
+                  <a:srgbClr val="111111"/>
+                </a:solidFill>
+                <a:latin typeface="Times New Roman" pitchFamily="34" charset="0"/>
+                <a:ea typeface="Times New Roman" pitchFamily="34" charset="-122"/>
+                <a:cs typeface="Times New Roman" pitchFamily="34" charset="-120"/>
+              </a:rPr>
+              <a:t>The Nile, the Congo, the Niger and Lake Victoria.</a:t>
+            </a:r>
+            <a:endParaRPr lang="en-US" sz="4000" dirty="0"/>
+          </a:p>
+          <a:p>
+            <a:pPr algn="l" marL="342900" indent="-342900">
+              <a:spcAft>
+                <a:spcPts val="800"/>
+              </a:spcAft>
+              <a:buSzPct val="100000"/>
+              <a:buChar char="•"/>
+            </a:pPr>
+            <a:r>
+              <a:rPr lang="en-US" sz="4000" b="1" dirty="0">
+                <a:solidFill>
+                  <a:srgbClr val="111111"/>
+                </a:solidFill>
+                <a:latin typeface="Times New Roman" pitchFamily="34" charset="0"/>
+                <a:ea typeface="Times New Roman" pitchFamily="34" charset="-122"/>
+                <a:cs typeface="Times New Roman" pitchFamily="34" charset="-120"/>
+              </a:rPr>
+              <a:t>Few coastal plains: </a:t>
+            </a:r>
+            <a:pPr algn="l" marL="342900" indent="-342900">
+              <a:spcAft>
+                <a:spcPts val="800"/>
+              </a:spcAft>
+              <a:buSzPct val="100000"/>
+              <a:buChar char="•"/>
+            </a:pPr>
+            <a:r>
+              <a:rPr lang="en-US" sz="4000" dirty="0">
+                <a:solidFill>
+                  <a:srgbClr val="111111"/>
+                </a:solidFill>
+                <a:latin typeface="Times New Roman" pitchFamily="34" charset="0"/>
+                <a:ea typeface="Times New Roman" pitchFamily="34" charset="-122"/>
+                <a:cs typeface="Times New Roman" pitchFamily="34" charset="-120"/>
+              </a:rPr>
+              <a:t>The coasts are smooth, with few bays.</a:t>
             </a:r>
             <a:endParaRPr lang="en-US" sz="4000" dirty="0"/>
           </a:p>
@@ -15654,7 +15923,7 @@
                 <a:ea typeface="Times New Roman" pitchFamily="34" charset="-122"/>
                 <a:cs typeface="Times New Roman" pitchFamily="34" charset="-120"/>
               </a:rPr>
-              <a:t>Expected Answer</a:t>
+              <a:t>Evaluation 1</a:t>
             </a:r>
             <a:endParaRPr lang="en-US" sz="3600" dirty="0"/>
           </a:p>
@@ -15696,7 +15965,7 @@
                 <a:ea typeface="Times New Roman" pitchFamily="34" charset="-122"/>
                 <a:cs typeface="Times New Roman" pitchFamily="34" charset="-120"/>
               </a:rPr>
-              <a:t>Atlantic, Indian, Mediterranean and Red Sea.</a:t>
+              <a:t>Name the four seas and oceans around Africa.</a:t>
             </a:r>
             <a:endParaRPr lang="en-US" sz="4000" dirty="0"/>
           </a:p>
@@ -15873,7 +16142,7 @@
                 <a:ea typeface="Times New Roman" pitchFamily="34" charset="-122"/>
                 <a:cs typeface="Times New Roman" pitchFamily="34" charset="-120"/>
               </a:rPr>
-              <a:t>Evaluation 2</a:t>
+              <a:t>Expected Answer</a:t>
             </a:r>
             <a:endParaRPr lang="en-US" sz="3600" dirty="0"/>
           </a:p>
@@ -15915,7 +16184,7 @@
                 <a:ea typeface="Times New Roman" pitchFamily="34" charset="-122"/>
                 <a:cs typeface="Times New Roman" pitchFamily="34" charset="-120"/>
               </a:rPr>
-              <a:t>What is the highest mountain of Africa?</a:t>
+              <a:t>Atlantic, Indian, Mediterranean and Red Sea.</a:t>
             </a:r>
             <a:endParaRPr lang="en-US" sz="4000" dirty="0"/>
           </a:p>
@@ -16092,7 +16361,7 @@
                 <a:ea typeface="Times New Roman" pitchFamily="34" charset="-122"/>
                 <a:cs typeface="Times New Roman" pitchFamily="34" charset="-120"/>
               </a:rPr>
-              <a:t>Expected Answer</a:t>
+              <a:t>Evaluation 2</a:t>
             </a:r>
             <a:endParaRPr lang="en-US" sz="3600" dirty="0"/>
           </a:p>
@@ -16134,7 +16403,7 @@
                 <a:ea typeface="Times New Roman" pitchFamily="34" charset="-122"/>
                 <a:cs typeface="Times New Roman" pitchFamily="34" charset="-120"/>
               </a:rPr>
-              <a:t>Kilimanjaro.</a:t>
+              <a:t>What is the highest mountain of Africa?</a:t>
             </a:r>
             <a:endParaRPr lang="en-US" sz="4000" dirty="0"/>
           </a:p>
@@ -16246,7 +16515,7 @@
                 <a:ea typeface="Calibri" pitchFamily="34" charset="-122"/>
                 <a:cs typeface="Calibri" pitchFamily="34" charset="-120"/>
               </a:rPr>
-              <a:t>REMEDIATION</a:t>
+              <a:t>FORMATIVE EVALUATION</a:t>
             </a:r>
             <a:endParaRPr lang="en-US" sz="1400" dirty="0"/>
           </a:p>
@@ -16269,7 +16538,7 @@
         <p:spPr>
           <a:xfrm>
             <a:off x="0" y="658368"/>
-            <a:ext cx="2468880" cy="5833872"/>
+            <a:ext cx="5120640" cy="5833872"/>
           </a:xfrm>
           <a:prstGeom prst="rect">
             <a:avLst/>
@@ -16284,8 +16553,8 @@
         </p:nvSpPr>
         <p:spPr>
           <a:xfrm>
-            <a:off x="2697480" y="1005840"/>
-            <a:ext cx="9174175" cy="731520"/>
+            <a:off x="5349240" y="1005840"/>
+            <a:ext cx="6522415" cy="731520"/>
           </a:xfrm>
           <a:prstGeom prst="rect">
             <a:avLst/>
@@ -16311,7 +16580,7 @@
                 <a:ea typeface="Times New Roman" pitchFamily="34" charset="-122"/>
                 <a:cs typeface="Times New Roman" pitchFamily="34" charset="-120"/>
               </a:rPr>
-              <a:t>Remediation</a:t>
+              <a:t>Expected Answer</a:t>
             </a:r>
             <a:endParaRPr lang="en-US" sz="3600" dirty="0"/>
           </a:p>
@@ -16325,8 +16594,8 @@
         </p:nvSpPr>
         <p:spPr>
           <a:xfrm>
-            <a:off x="2697480" y="1783080"/>
-            <a:ext cx="9174175" cy="4663440"/>
+            <a:off x="5349240" y="1783080"/>
+            <a:ext cx="6522415" cy="4663440"/>
           </a:xfrm>
           <a:prstGeom prst="rect">
             <a:avLst/>
@@ -16345,7 +16614,7 @@
               <a:buNone/>
             </a:pPr>
             <a:r>
-              <a:rPr lang="en-US" sz="4000" b="1" dirty="0">
+              <a:rPr lang="en-US" sz="4000" dirty="0">
                 <a:solidFill>
                   <a:srgbClr val="111111"/>
                 </a:solidFill>
@@ -16353,73 +16622,7 @@
                 <a:ea typeface="Times New Roman" pitchFamily="34" charset="-122"/>
                 <a:cs typeface="Times New Roman" pitchFamily="34" charset="-120"/>
               </a:rPr>
-              <a:t>Fill in the blanks:</a:t>
-            </a:r>
-            <a:endParaRPr lang="en-US" sz="4000" dirty="0"/>
-          </a:p>
-          <a:p>
-            <a:pPr algn="l" marL="342900" indent="-342900">
-              <a:spcAft>
-                <a:spcPts val="800"/>
-              </a:spcAft>
-              <a:buSzPct val="100000"/>
-              <a:buFont typeface="+mj-lt"/>
-              <a:buAutoNum type="arabicPeriod" startAt="1"/>
-            </a:pPr>
-            <a:r>
-              <a:rPr lang="en-US" sz="4000" dirty="0">
-                <a:solidFill>
-                  <a:srgbClr val="111111"/>
-                </a:solidFill>
-                <a:latin typeface="Times New Roman" pitchFamily="34" charset="0"/>
-                <a:ea typeface="Times New Roman" pitchFamily="34" charset="-122"/>
-                <a:cs typeface="Times New Roman" pitchFamily="34" charset="-120"/>
-              </a:rPr>
-              <a:t>Africa is a ______, not a country.</a:t>
-            </a:r>
-            <a:endParaRPr lang="en-US" sz="4000" dirty="0"/>
-          </a:p>
-          <a:p>
-            <a:pPr algn="l" marL="342900" indent="-342900">
-              <a:spcAft>
-                <a:spcPts val="800"/>
-              </a:spcAft>
-              <a:buSzPct val="100000"/>
-              <a:buFont typeface="+mj-lt"/>
-              <a:buAutoNum type="arabicPeriod" startAt="1"/>
-            </a:pPr>
-            <a:r>
-              <a:rPr lang="en-US" sz="4000" dirty="0">
-                <a:solidFill>
-                  <a:srgbClr val="111111"/>
-                </a:solidFill>
-                <a:latin typeface="Times New Roman" pitchFamily="34" charset="0"/>
-                <a:ea typeface="Times New Roman" pitchFamily="34" charset="-122"/>
-                <a:cs typeface="Times New Roman" pitchFamily="34" charset="-120"/>
-              </a:rPr>
-              <a:t>The longest river of Africa is the ______.</a:t>
-            </a:r>
-            <a:endParaRPr lang="en-US" sz="4000" dirty="0"/>
-          </a:p>
-          <a:p>
-            <a:pPr algn="l" marL="342900" indent="-342900">
-              <a:spcAft>
-                <a:spcPts val="800"/>
-              </a:spcAft>
-              <a:buSzPct val="100000"/>
-              <a:buFont typeface="+mj-lt"/>
-              <a:buAutoNum type="arabicPeriod" startAt="1"/>
-            </a:pPr>
-            <a:r>
-              <a:rPr lang="en-US" sz="4000" dirty="0">
-                <a:solidFill>
-                  <a:srgbClr val="111111"/>
-                </a:solidFill>
-                <a:latin typeface="Times New Roman" pitchFamily="34" charset="0"/>
-                <a:ea typeface="Times New Roman" pitchFamily="34" charset="-122"/>
-                <a:cs typeface="Times New Roman" pitchFamily="34" charset="-120"/>
-              </a:rPr>
-              <a:t>High, flat land is called a ______.</a:t>
+              <a:t>Kilimanjaro.</a:t>
             </a:r>
             <a:endParaRPr lang="en-US" sz="4000" dirty="0"/>
           </a:p>
@@ -16531,7 +16734,7 @@
                 <a:ea typeface="Calibri" pitchFamily="34" charset="-122"/>
                 <a:cs typeface="Calibri" pitchFamily="34" charset="-120"/>
               </a:rPr>
-              <a:t>HOMEWORK</a:t>
+              <a:t>REMEDIATION</a:t>
             </a:r>
             <a:endParaRPr lang="en-US" sz="1400" dirty="0"/>
           </a:p>
@@ -16554,7 +16757,7 @@
         <p:spPr>
           <a:xfrm>
             <a:off x="0" y="658368"/>
-            <a:ext cx="5120640" cy="5833872"/>
+            <a:ext cx="2468880" cy="5833872"/>
           </a:xfrm>
           <a:prstGeom prst="rect">
             <a:avLst/>
@@ -16569,8 +16772,8 @@
         </p:nvSpPr>
         <p:spPr>
           <a:xfrm>
-            <a:off x="5349240" y="1005840"/>
-            <a:ext cx="6522415" cy="731520"/>
+            <a:off x="2697480" y="1005840"/>
+            <a:ext cx="9174175" cy="731520"/>
           </a:xfrm>
           <a:prstGeom prst="rect">
             <a:avLst/>
@@ -16596,7 +16799,7 @@
                 <a:ea typeface="Times New Roman" pitchFamily="34" charset="-122"/>
                 <a:cs typeface="Times New Roman" pitchFamily="34" charset="-120"/>
               </a:rPr>
-              <a:t>Homework</a:t>
+              <a:t>Remediation</a:t>
             </a:r>
             <a:endParaRPr lang="en-US" sz="3600" dirty="0"/>
           </a:p>
@@ -16610,8 +16813,8 @@
         </p:nvSpPr>
         <p:spPr>
           <a:xfrm>
-            <a:off x="5349240" y="1783080"/>
-            <a:ext cx="6522415" cy="4663440"/>
+            <a:off x="2697480" y="1783080"/>
+            <a:ext cx="9174175" cy="4663440"/>
           </a:xfrm>
           <a:prstGeom prst="rect">
             <a:avLst/>
@@ -16630,7 +16833,7 @@
               <a:buNone/>
             </a:pPr>
             <a:r>
-              <a:rPr lang="en-US" sz="4000" dirty="0">
+              <a:rPr lang="en-US" sz="4000" b="1" dirty="0">
                 <a:solidFill>
                   <a:srgbClr val="111111"/>
                 </a:solidFill>
@@ -16638,7 +16841,73 @@
                 <a:ea typeface="Times New Roman" pitchFamily="34" charset="-122"/>
                 <a:cs typeface="Times New Roman" pitchFamily="34" charset="-120"/>
               </a:rPr>
-              <a:t>Compare the climate of Douala, Garoua and Maroua. Which town is the wettest, and which is the driest? Ask an adult or use your textbook.</a:t>
+              <a:t>Fill in the blanks:</a:t>
+            </a:r>
+            <a:endParaRPr lang="en-US" sz="4000" dirty="0"/>
+          </a:p>
+          <a:p>
+            <a:pPr algn="l" marL="342900" indent="-342900">
+              <a:spcAft>
+                <a:spcPts val="800"/>
+              </a:spcAft>
+              <a:buSzPct val="100000"/>
+              <a:buFont typeface="+mj-lt"/>
+              <a:buAutoNum type="arabicPeriod" startAt="1"/>
+            </a:pPr>
+            <a:r>
+              <a:rPr lang="en-US" sz="4000" dirty="0">
+                <a:solidFill>
+                  <a:srgbClr val="111111"/>
+                </a:solidFill>
+                <a:latin typeface="Times New Roman" pitchFamily="34" charset="0"/>
+                <a:ea typeface="Times New Roman" pitchFamily="34" charset="-122"/>
+                <a:cs typeface="Times New Roman" pitchFamily="34" charset="-120"/>
+              </a:rPr>
+              <a:t>Africa is a ______, not a country.</a:t>
+            </a:r>
+            <a:endParaRPr lang="en-US" sz="4000" dirty="0"/>
+          </a:p>
+          <a:p>
+            <a:pPr algn="l" marL="342900" indent="-342900">
+              <a:spcAft>
+                <a:spcPts val="800"/>
+              </a:spcAft>
+              <a:buSzPct val="100000"/>
+              <a:buFont typeface="+mj-lt"/>
+              <a:buAutoNum type="arabicPeriod" startAt="1"/>
+            </a:pPr>
+            <a:r>
+              <a:rPr lang="en-US" sz="4000" dirty="0">
+                <a:solidFill>
+                  <a:srgbClr val="111111"/>
+                </a:solidFill>
+                <a:latin typeface="Times New Roman" pitchFamily="34" charset="0"/>
+                <a:ea typeface="Times New Roman" pitchFamily="34" charset="-122"/>
+                <a:cs typeface="Times New Roman" pitchFamily="34" charset="-120"/>
+              </a:rPr>
+              <a:t>The longest river of Africa is the ______.</a:t>
+            </a:r>
+            <a:endParaRPr lang="en-US" sz="4000" dirty="0"/>
+          </a:p>
+          <a:p>
+            <a:pPr algn="l" marL="342900" indent="-342900">
+              <a:spcAft>
+                <a:spcPts val="800"/>
+              </a:spcAft>
+              <a:buSzPct val="100000"/>
+              <a:buFont typeface="+mj-lt"/>
+              <a:buAutoNum type="arabicPeriod" startAt="1"/>
+            </a:pPr>
+            <a:r>
+              <a:rPr lang="en-US" sz="4000" dirty="0">
+                <a:solidFill>
+                  <a:srgbClr val="111111"/>
+                </a:solidFill>
+                <a:latin typeface="Times New Roman" pitchFamily="34" charset="0"/>
+                <a:ea typeface="Times New Roman" pitchFamily="34" charset="-122"/>
+                <a:cs typeface="Times New Roman" pitchFamily="34" charset="-120"/>
+              </a:rPr>
+              <a:t>High, flat land is called a ______.</a:t>
             </a:r>
             <a:endParaRPr lang="en-US" sz="4000" dirty="0"/>
           </a:p>
@@ -16750,7 +17019,7 @@
                 <a:ea typeface="Calibri" pitchFamily="34" charset="-122"/>
                 <a:cs typeface="Calibri" pitchFamily="34" charset="-120"/>
               </a:rPr>
-              <a:t>NEXT LESSON</a:t>
+              <a:t>HOMEWORK</a:t>
             </a:r>
             <a:endParaRPr lang="en-US" sz="1400" dirty="0"/>
           </a:p>
@@ -16815,7 +17084,7 @@
                 <a:ea typeface="Times New Roman" pitchFamily="34" charset="-122"/>
                 <a:cs typeface="Times New Roman" pitchFamily="34" charset="-120"/>
               </a:rPr>
-              <a:t>Next Lesson</a:t>
+              <a:t>Homework</a:t>
             </a:r>
             <a:endParaRPr lang="en-US" sz="3600" dirty="0"/>
           </a:p>
@@ -16839,17 +17108,17 @@
           <a:ln/>
         </p:spPr>
         <p:txBody>
-          <a:bodyPr wrap="square" lIns="0" tIns="0" rIns="0" bIns="0" rtlCol="0" anchor="ctr"/>
-          <a:lstStyle/>
-          <a:p>
-            <a:pPr algn="ctr" indent="0" marL="0">
+          <a:bodyPr wrap="square" lIns="0" tIns="0" rIns="0" bIns="0" rtlCol="0" anchor="t"/>
+          <a:lstStyle/>
+          <a:p>
+            <a:pPr algn="l" indent="0" marL="0">
               <a:spcAft>
                 <a:spcPts val="800"/>
               </a:spcAft>
               <a:buNone/>
             </a:pPr>
             <a:r>
-              <a:rPr lang="en-US" sz="4000" b="1" dirty="0">
+              <a:rPr lang="en-US" sz="4000" dirty="0">
                 <a:solidFill>
                   <a:srgbClr val="111111"/>
                 </a:solidFill>
@@ -16857,27 +17126,7 @@
                 <a:ea typeface="Times New Roman" pitchFamily="34" charset="-122"/>
                 <a:cs typeface="Times New Roman" pitchFamily="34" charset="-120"/>
               </a:rPr>
-              <a:t>Our next lesson will be on:</a:t>
-            </a:r>
-            <a:endParaRPr lang="en-US" sz="4000" dirty="0"/>
-          </a:p>
-          <a:p>
-            <a:pPr algn="ctr" indent="0" marL="0">
-              <a:spcAft>
-                <a:spcPts val="800"/>
-              </a:spcAft>
-              <a:buNone/>
-            </a:pPr>
-            <a:r>
-              <a:rPr lang="en-US" sz="4000" b="1" dirty="0">
-                <a:solidFill>
-                  <a:srgbClr val="990011"/>
-                </a:solidFill>
-                <a:latin typeface="Times New Roman" pitchFamily="34" charset="0"/>
-                <a:ea typeface="Times New Roman" pitchFamily="34" charset="-122"/>
-                <a:cs typeface="Times New Roman" pitchFamily="34" charset="-120"/>
-              </a:rPr>
-              <a:t>Lesson 6 (Part 2): Africa: Climate, Soils and Relief of Africa</a:t>
+              <a:t>Compare the climate of Douala, Garoua and Maroua. Which town is the wettest, and which is the driest? Ask an adult or use your textbook.</a:t>
             </a:r>
             <a:endParaRPr lang="en-US" sz="4000" dirty="0"/>
           </a:p>
@@ -16989,6 +17238,245 @@
                 <a:ea typeface="Calibri" pitchFamily="34" charset="-122"/>
                 <a:cs typeface="Calibri" pitchFamily="34" charset="-120"/>
               </a:rPr>
+              <a:t>NEXT LESSON</a:t>
+            </a:r>
+            <a:endParaRPr lang="en-US" sz="1400" dirty="0"/>
+          </a:p>
+        </p:txBody>
+      </p:sp>
+      <p:pic>
+        <p:nvPicPr>
+          <p:cNvPr id="3" name="Image 0" descr="/home/claude/f4/img/minesec_sheet.png">    </p:cNvPr>
+          <p:cNvPicPr>
+            <a:picLocks noChangeAspect="1"/>
+          </p:cNvPicPr>
+          <p:nvPr/>
+        </p:nvPicPr>
+        <p:blipFill>
+          <a:blip r:embed="rId1"/>
+          <a:stretch>
+            <a:fillRect/>
+          </a:stretch>
+        </p:blipFill>
+        <p:spPr>
+          <a:xfrm>
+            <a:off x="0" y="658368"/>
+            <a:ext cx="5120640" cy="5833872"/>
+          </a:xfrm>
+          <a:prstGeom prst="rect">
+            <a:avLst/>
+          </a:prstGeom>
+        </p:spPr>
+      </p:pic>
+      <p:sp>
+        <p:nvSpPr>
+          <p:cNvPr id="4" name="Text 1"/>
+          <p:cNvSpPr/>
+          <p:nvPr/>
+        </p:nvSpPr>
+        <p:spPr>
+          <a:xfrm>
+            <a:off x="5349240" y="1005840"/>
+            <a:ext cx="6522415" cy="731520"/>
+          </a:xfrm>
+          <a:prstGeom prst="rect">
+            <a:avLst/>
+          </a:prstGeom>
+          <a:noFill/>
+          <a:ln/>
+        </p:spPr>
+        <p:txBody>
+          <a:bodyPr wrap="square" lIns="0" tIns="0" rIns="0" bIns="0" rtlCol="0" anchor="ctr">
+            <a:normAutofit/>
+          </a:bodyPr>
+          <a:lstStyle/>
+          <a:p>
+            <a:pPr algn="ctr" indent="0" marL="0">
+              <a:buNone/>
+            </a:pPr>
+            <a:r>
+              <a:rPr lang="en-US" sz="3600" b="1" dirty="0">
+                <a:solidFill>
+                  <a:srgbClr val="990011"/>
+                </a:solidFill>
+                <a:latin typeface="Times New Roman" pitchFamily="34" charset="0"/>
+                <a:ea typeface="Times New Roman" pitchFamily="34" charset="-122"/>
+                <a:cs typeface="Times New Roman" pitchFamily="34" charset="-120"/>
+              </a:rPr>
+              <a:t>Next Lesson</a:t>
+            </a:r>
+            <a:endParaRPr lang="en-US" sz="3600" dirty="0"/>
+          </a:p>
+        </p:txBody>
+      </p:sp>
+      <p:sp>
+        <p:nvSpPr>
+          <p:cNvPr id="5" name="Text 2"/>
+          <p:cNvSpPr/>
+          <p:nvPr/>
+        </p:nvSpPr>
+        <p:spPr>
+          <a:xfrm>
+            <a:off x="5349240" y="1783080"/>
+            <a:ext cx="6522415" cy="4663440"/>
+          </a:xfrm>
+          <a:prstGeom prst="rect">
+            <a:avLst/>
+          </a:prstGeom>
+          <a:noFill/>
+          <a:ln/>
+        </p:spPr>
+        <p:txBody>
+          <a:bodyPr wrap="square" lIns="0" tIns="0" rIns="0" bIns="0" rtlCol="0" anchor="ctr"/>
+          <a:lstStyle/>
+          <a:p>
+            <a:pPr algn="ctr" indent="0" marL="0">
+              <a:spcAft>
+                <a:spcPts val="800"/>
+              </a:spcAft>
+              <a:buNone/>
+            </a:pPr>
+            <a:r>
+              <a:rPr lang="en-US" sz="4000" b="1" dirty="0">
+                <a:solidFill>
+                  <a:srgbClr val="111111"/>
+                </a:solidFill>
+                <a:latin typeface="Times New Roman" pitchFamily="34" charset="0"/>
+                <a:ea typeface="Times New Roman" pitchFamily="34" charset="-122"/>
+                <a:cs typeface="Times New Roman" pitchFamily="34" charset="-120"/>
+              </a:rPr>
+              <a:t>Our next lesson will be on:</a:t>
+            </a:r>
+            <a:endParaRPr lang="en-US" sz="4000" dirty="0"/>
+          </a:p>
+          <a:p>
+            <a:pPr algn="ctr" indent="0" marL="0">
+              <a:spcAft>
+                <a:spcPts val="800"/>
+              </a:spcAft>
+              <a:buNone/>
+            </a:pPr>
+            <a:r>
+              <a:rPr lang="en-US" sz="4000" b="1" dirty="0">
+                <a:solidFill>
+                  <a:srgbClr val="990011"/>
+                </a:solidFill>
+                <a:latin typeface="Times New Roman" pitchFamily="34" charset="0"/>
+                <a:ea typeface="Times New Roman" pitchFamily="34" charset="-122"/>
+                <a:cs typeface="Times New Roman" pitchFamily="34" charset="-120"/>
+              </a:rPr>
+              <a:t>Lesson 6 (Part 2): Africa: Climate, Soils and Relief of Africa</a:t>
+            </a:r>
+            <a:endParaRPr lang="en-US" sz="4000" dirty="0"/>
+          </a:p>
+        </p:txBody>
+      </p:sp>
+      <p:sp>
+        <p:nvSpPr>
+          <p:cNvPr id="25" name="Slide Number Placeholder 0"/>
+          <p:cNvSpPr>
+            <a:spLocks noGrp="1"/>
+          </p:cNvSpPr>
+          <p:nvPr>
+            <p:ph type="sldNum" sz="quarter" idx="4294967295"/>
+          </p:nvPr>
+        </p:nvSpPr>
+        <p:spPr>
+          <a:xfrm>
+            <a:off x="27432" y="91440"/>
+            <a:ext cx="585216" cy="475488"/>
+          </a:xfrm>
+          <a:prstGeom prst="rect">
+            <a:avLst/>
+          </a:prstGeom>
+          <a:extLst>
+            <a:ext uri="{C572A759-6A51-4108-AA02-DFA0A04FC94B}">
+              <ma14:wrappingTextBoxFlag xmlns:ma14="http://schemas.microsoft.com/office/mac/drawingml/2011/main" val="0"/>
+            </a:ext>
+          </a:extLst>
+        </p:spPr>
+        <p:txBody>
+          <a:bodyPr/>
+          <a:lstStyle>
+            <a:lvl1pPr>
+              <a:defRPr sz="2000">
+                <a:solidFill>
+                  <a:srgbClr val="FFFFFF"/>
+                </a:solidFill>
+                <a:latin typeface="Calibri"/>
+                <a:ea typeface="Calibri"/>
+                <a:cs typeface="Calibri"/>
+              </a:defRPr>
+            </a:lvl1pPr>
+          </a:lstStyle>
+          <a:p>
+            <a:pPr algn="ctr"/>
+            <a:fld id="{F7021451-1387-4CA6-816F-3879F97B5CBC}" type="slidenum">
+              <a:rPr b="1" lang="en-US"/>
+              <a:t>48</a:t>
+            </a:fld>
+            <a:endParaRPr lang="en-US"/>
+          </a:p>
+        </p:txBody>
+      </p:sp>
+    </p:spTree>
+  </p:cSld>
+  <p:clrMapOvr>
+    <a:masterClrMapping/>
+  </p:clrMapOvr>
+</p:sld>
+</file>
+
+<file path=ppt/slides/slide49.xml><?xml version="1.0" encoding="utf-8"?>
+<p:sld xmlns:a="http://schemas.openxmlformats.org/drawingml/2006/main" xmlns:r="http://schemas.openxmlformats.org/officeDocument/2006/relationships" xmlns:p="http://schemas.openxmlformats.org/presentationml/2006/main">
+  <p:cSld name="Slide 49">
+    <p:spTree>
+      <p:nvGrpSpPr>
+        <p:cNvPr id="1" name=""/>
+        <p:cNvGrpSpPr/>
+        <p:nvPr/>
+      </p:nvGrpSpPr>
+      <p:grpSpPr>
+        <a:xfrm>
+          <a:off x="0" y="0"/>
+          <a:ext cx="0" cy="0"/>
+          <a:chOff x="0" y="0"/>
+          <a:chExt cx="0" cy="0"/>
+        </a:xfrm>
+      </p:grpSpPr>
+      <p:sp>
+        <p:nvSpPr>
+          <p:cNvPr id="2" name="Text 0"/>
+          <p:cNvSpPr/>
+          <p:nvPr/>
+        </p:nvSpPr>
+        <p:spPr>
+          <a:xfrm>
+            <a:off x="457200" y="713232"/>
+            <a:ext cx="11368735" cy="274320"/>
+          </a:xfrm>
+          <a:prstGeom prst="rect">
+            <a:avLst/>
+          </a:prstGeom>
+          <a:noFill/>
+          <a:ln/>
+        </p:spPr>
+        <p:txBody>
+          <a:bodyPr wrap="square" lIns="0" tIns="0" rIns="0" bIns="0" rtlCol="0" anchor="ctr"/>
+          <a:lstStyle/>
+          <a:p>
+            <a:pPr algn="r" indent="0" marL="0">
+              <a:buNone/>
+            </a:pPr>
+            <a:r>
+              <a:rPr lang="en-US" sz="1400" b="1" dirty="0">
+                <a:solidFill>
+                  <a:srgbClr val="1C3F6E"/>
+                </a:solidFill>
+                <a:latin typeface="Calibri" pitchFamily="34" charset="0"/>
+                <a:ea typeface="Calibri" pitchFamily="34" charset="-122"/>
+                <a:cs typeface="Calibri" pitchFamily="34" charset="-120"/>
+              </a:rPr>
               <a:t>BILINGUAL GAME</a:t>
             </a:r>
             <a:endParaRPr lang="en-US" sz="1400" dirty="0"/>
@@ -17036,7 +17524,7 @@
       </p:sp>
       <p:graphicFrame>
         <p:nvGraphicFramePr>
-          <p:cNvPr id="49" name="Table 0"/>
+          <p:cNvPr id="50" name="Table 0"/>
           <p:cNvGraphicFramePr>
             <a:graphicFrameLocks noGrp="1"/>
           </p:cNvGraphicFramePr>
@@ -18348,7 +18836,7 @@
             <a:pPr algn="ctr"/>
             <a:fld id="{F7021451-1387-4CA6-816F-3879F97B5CBC}" type="slidenum">
               <a:rPr b="1" lang="en-US"/>
-              <a:t>48</a:t>
+              <a:t>49</a:t>
             </a:fld>
             <a:endParaRPr lang="en-US"/>
           </a:p>
@@ -18362,9 +18850,9 @@
 </p:sld>
 </file>
 
-<file path=ppt/slides/slide49.xml><?xml version="1.0" encoding="utf-8"?>
+<file path=ppt/slides/slide5.xml><?xml version="1.0" encoding="utf-8"?>
 <p:sld xmlns:a="http://schemas.openxmlformats.org/drawingml/2006/main" xmlns:r="http://schemas.openxmlformats.org/officeDocument/2006/relationships" xmlns:p="http://schemas.openxmlformats.org/presentationml/2006/main">
-  <p:cSld name="Slide 49">
+  <p:cSld name="Slide 5">
     <p:spTree>
       <p:nvGrpSpPr>
         <p:cNvPr id="1" name=""/>
@@ -18412,6 +18900,225 @@
                 <a:ea typeface="Calibri" pitchFamily="34" charset="-122"/>
                 <a:cs typeface="Calibri" pitchFamily="34" charset="-120"/>
               </a:rPr>
+              <a:t>HOMEWORK CORRECTION</a:t>
+            </a:r>
+            <a:endParaRPr lang="en-US" sz="1400" dirty="0"/>
+          </a:p>
+        </p:txBody>
+      </p:sp>
+      <p:pic>
+        <p:nvPicPr>
+          <p:cNvPr id="3" name="Image 0" descr="/home/claude/f4/img/minesec_sheet.png">    </p:cNvPr>
+          <p:cNvPicPr>
+            <a:picLocks noChangeAspect="1"/>
+          </p:cNvPicPr>
+          <p:nvPr/>
+        </p:nvPicPr>
+        <p:blipFill>
+          <a:blip r:embed="rId1"/>
+          <a:stretch>
+            <a:fillRect/>
+          </a:stretch>
+        </p:blipFill>
+        <p:spPr>
+          <a:xfrm>
+            <a:off x="0" y="658368"/>
+            <a:ext cx="5120640" cy="5833872"/>
+          </a:xfrm>
+          <a:prstGeom prst="rect">
+            <a:avLst/>
+          </a:prstGeom>
+        </p:spPr>
+      </p:pic>
+      <p:sp>
+        <p:nvSpPr>
+          <p:cNvPr id="4" name="Text 1"/>
+          <p:cNvSpPr/>
+          <p:nvPr/>
+        </p:nvSpPr>
+        <p:spPr>
+          <a:xfrm>
+            <a:off x="5349240" y="1005840"/>
+            <a:ext cx="6522415" cy="731520"/>
+          </a:xfrm>
+          <a:prstGeom prst="rect">
+            <a:avLst/>
+          </a:prstGeom>
+          <a:noFill/>
+          <a:ln/>
+        </p:spPr>
+        <p:txBody>
+          <a:bodyPr wrap="square" lIns="0" tIns="0" rIns="0" bIns="0" rtlCol="0" anchor="ctr">
+            <a:normAutofit/>
+          </a:bodyPr>
+          <a:lstStyle/>
+          <a:p>
+            <a:pPr algn="ctr" indent="0" marL="0">
+              <a:buNone/>
+            </a:pPr>
+            <a:r>
+              <a:rPr lang="en-US" sz="3600" b="1" dirty="0">
+                <a:solidFill>
+                  <a:srgbClr val="990011"/>
+                </a:solidFill>
+                <a:latin typeface="Times New Roman" pitchFamily="34" charset="0"/>
+                <a:ea typeface="Times New Roman" pitchFamily="34" charset="-122"/>
+                <a:cs typeface="Times New Roman" pitchFamily="34" charset="-120"/>
+              </a:rPr>
+              <a:t>Correction: Possible Answer</a:t>
+            </a:r>
+            <a:endParaRPr lang="en-US" sz="3600" dirty="0"/>
+          </a:p>
+        </p:txBody>
+      </p:sp>
+      <p:sp>
+        <p:nvSpPr>
+          <p:cNvPr id="5" name="Text 2"/>
+          <p:cNvSpPr/>
+          <p:nvPr/>
+        </p:nvSpPr>
+        <p:spPr>
+          <a:xfrm>
+            <a:off x="5349240" y="1783080"/>
+            <a:ext cx="6522415" cy="4663440"/>
+          </a:xfrm>
+          <a:prstGeom prst="rect">
+            <a:avLst/>
+          </a:prstGeom>
+          <a:noFill/>
+          <a:ln/>
+        </p:spPr>
+        <p:txBody>
+          <a:bodyPr wrap="square" lIns="0" tIns="0" rIns="0" bIns="0" rtlCol="0" anchor="t"/>
+          <a:lstStyle/>
+          <a:p>
+            <a:pPr algn="l" indent="0" marL="0">
+              <a:spcAft>
+                <a:spcPts val="800"/>
+              </a:spcAft>
+              <a:buNone/>
+            </a:pPr>
+            <a:r>
+              <a:rPr lang="en-US" sz="4000" dirty="0">
+                <a:solidFill>
+                  <a:srgbClr val="111111"/>
+                </a:solidFill>
+                <a:latin typeface="Times New Roman" pitchFamily="34" charset="0"/>
+                <a:ea typeface="Times New Roman" pitchFamily="34" charset="-122"/>
+                <a:cs typeface="Times New Roman" pitchFamily="34" charset="-120"/>
+              </a:rPr>
+              <a:t>Africa is surrounded by the Atlantic Ocean (west), the Indian Ocean (east), the Mediterranean Sea (north) and the Red Sea (north-east).</a:t>
+            </a:r>
+            <a:endParaRPr lang="en-US" sz="4000" dirty="0"/>
+          </a:p>
+        </p:txBody>
+      </p:sp>
+      <p:sp>
+        <p:nvSpPr>
+          <p:cNvPr id="25" name="Slide Number Placeholder 0"/>
+          <p:cNvSpPr>
+            <a:spLocks noGrp="1"/>
+          </p:cNvSpPr>
+          <p:nvPr>
+            <p:ph type="sldNum" sz="quarter" idx="4294967295"/>
+          </p:nvPr>
+        </p:nvSpPr>
+        <p:spPr>
+          <a:xfrm>
+            <a:off x="27432" y="91440"/>
+            <a:ext cx="585216" cy="475488"/>
+          </a:xfrm>
+          <a:prstGeom prst="rect">
+            <a:avLst/>
+          </a:prstGeom>
+          <a:extLst>
+            <a:ext uri="{C572A759-6A51-4108-AA02-DFA0A04FC94B}">
+              <ma14:wrappingTextBoxFlag xmlns:ma14="http://schemas.microsoft.com/office/mac/drawingml/2011/main" val="0"/>
+            </a:ext>
+          </a:extLst>
+        </p:spPr>
+        <p:txBody>
+          <a:bodyPr/>
+          <a:lstStyle>
+            <a:lvl1pPr>
+              <a:defRPr sz="2000">
+                <a:solidFill>
+                  <a:srgbClr val="FFFFFF"/>
+                </a:solidFill>
+                <a:latin typeface="Calibri"/>
+                <a:ea typeface="Calibri"/>
+                <a:cs typeface="Calibri"/>
+              </a:defRPr>
+            </a:lvl1pPr>
+          </a:lstStyle>
+          <a:p>
+            <a:pPr algn="ctr"/>
+            <a:fld id="{F7021451-1387-4CA6-816F-3879F97B5CBC}" type="slidenum">
+              <a:rPr b="1" lang="en-US"/>
+              <a:t>5</a:t>
+            </a:fld>
+            <a:endParaRPr lang="en-US"/>
+          </a:p>
+        </p:txBody>
+      </p:sp>
+    </p:spTree>
+  </p:cSld>
+  <p:clrMapOvr>
+    <a:masterClrMapping/>
+  </p:clrMapOvr>
+</p:sld>
+</file>
+
+<file path=ppt/slides/slide50.xml><?xml version="1.0" encoding="utf-8"?>
+<p:sld xmlns:a="http://schemas.openxmlformats.org/drawingml/2006/main" xmlns:r="http://schemas.openxmlformats.org/officeDocument/2006/relationships" xmlns:p="http://schemas.openxmlformats.org/presentationml/2006/main">
+  <p:cSld name="Slide 50">
+    <p:spTree>
+      <p:nvGrpSpPr>
+        <p:cNvPr id="1" name=""/>
+        <p:cNvGrpSpPr/>
+        <p:nvPr/>
+      </p:nvGrpSpPr>
+      <p:grpSpPr>
+        <a:xfrm>
+          <a:off x="0" y="0"/>
+          <a:ext cx="0" cy="0"/>
+          <a:chOff x="0" y="0"/>
+          <a:chExt cx="0" cy="0"/>
+        </a:xfrm>
+      </p:grpSpPr>
+      <p:sp>
+        <p:nvSpPr>
+          <p:cNvPr id="2" name="Text 0"/>
+          <p:cNvSpPr/>
+          <p:nvPr/>
+        </p:nvSpPr>
+        <p:spPr>
+          <a:xfrm>
+            <a:off x="457200" y="713232"/>
+            <a:ext cx="11368735" cy="274320"/>
+          </a:xfrm>
+          <a:prstGeom prst="rect">
+            <a:avLst/>
+          </a:prstGeom>
+          <a:noFill/>
+          <a:ln/>
+        </p:spPr>
+        <p:txBody>
+          <a:bodyPr wrap="square" lIns="0" tIns="0" rIns="0" bIns="0" rtlCol="0" anchor="ctr"/>
+          <a:lstStyle/>
+          <a:p>
+            <a:pPr algn="r" indent="0" marL="0">
+              <a:buNone/>
+            </a:pPr>
+            <a:r>
+              <a:rPr lang="en-US" sz="1400" b="1" dirty="0">
+                <a:solidFill>
+                  <a:srgbClr val="1C3F6E"/>
+                </a:solidFill>
+                <a:latin typeface="Calibri" pitchFamily="34" charset="0"/>
+                <a:ea typeface="Calibri" pitchFamily="34" charset="-122"/>
+                <a:cs typeface="Calibri" pitchFamily="34" charset="-120"/>
+              </a:rPr>
               <a:t>LOGBOOK</a:t>
             </a:r>
             <a:endParaRPr lang="en-US" sz="1400" dirty="0"/>
@@ -18459,7 +19166,7 @@
       </p:sp>
       <p:graphicFrame>
         <p:nvGraphicFramePr>
-          <p:cNvPr id="50" name="Table 0"/>
+          <p:cNvPr id="51" name="Table 0"/>
           <p:cNvGraphicFramePr>
             <a:graphicFrameLocks noGrp="1"/>
           </p:cNvGraphicFramePr>
@@ -19081,7 +19788,7 @@
             <a:pPr algn="ctr"/>
             <a:fld id="{F7021451-1387-4CA6-816F-3879F97B5CBC}" type="slidenum">
               <a:rPr b="1" lang="en-US"/>
-              <a:t>49</a:t>
+              <a:t>50</a:t>
             </a:fld>
             <a:endParaRPr lang="en-US"/>
           </a:p>
@@ -19095,9 +19802,9 @@
 </p:sld>
 </file>
 
-<file path=ppt/slides/slide5.xml><?xml version="1.0" encoding="utf-8"?>
+<file path=ppt/slides/slide51.xml><?xml version="1.0" encoding="utf-8"?>
 <p:sld xmlns:a="http://schemas.openxmlformats.org/drawingml/2006/main" xmlns:r="http://schemas.openxmlformats.org/officeDocument/2006/relationships" xmlns:p="http://schemas.openxmlformats.org/presentationml/2006/main">
-  <p:cSld name="Slide 5">
+  <p:cSld name="Slide 51">
     <p:spTree>
       <p:nvGrpSpPr>
         <p:cNvPr id="1" name=""/>
@@ -19145,225 +19852,6 @@
                 <a:ea typeface="Calibri" pitchFamily="34" charset="-122"/>
                 <a:cs typeface="Calibri" pitchFamily="34" charset="-120"/>
               </a:rPr>
-              <a:t>HOMEWORK CORRECTION</a:t>
-            </a:r>
-            <a:endParaRPr lang="en-US" sz="1400" dirty="0"/>
-          </a:p>
-        </p:txBody>
-      </p:sp>
-      <p:pic>
-        <p:nvPicPr>
-          <p:cNvPr id="3" name="Image 0" descr="/home/claude/f4/img/minesec_sheet.png">    </p:cNvPr>
-          <p:cNvPicPr>
-            <a:picLocks noChangeAspect="1"/>
-          </p:cNvPicPr>
-          <p:nvPr/>
-        </p:nvPicPr>
-        <p:blipFill>
-          <a:blip r:embed="rId1"/>
-          <a:stretch>
-            <a:fillRect/>
-          </a:stretch>
-        </p:blipFill>
-        <p:spPr>
-          <a:xfrm>
-            <a:off x="0" y="658368"/>
-            <a:ext cx="5120640" cy="5833872"/>
-          </a:xfrm>
-          <a:prstGeom prst="rect">
-            <a:avLst/>
-          </a:prstGeom>
-        </p:spPr>
-      </p:pic>
-      <p:sp>
-        <p:nvSpPr>
-          <p:cNvPr id="4" name="Text 1"/>
-          <p:cNvSpPr/>
-          <p:nvPr/>
-        </p:nvSpPr>
-        <p:spPr>
-          <a:xfrm>
-            <a:off x="5349240" y="1005840"/>
-            <a:ext cx="6522415" cy="731520"/>
-          </a:xfrm>
-          <a:prstGeom prst="rect">
-            <a:avLst/>
-          </a:prstGeom>
-          <a:noFill/>
-          <a:ln/>
-        </p:spPr>
-        <p:txBody>
-          <a:bodyPr wrap="square" lIns="0" tIns="0" rIns="0" bIns="0" rtlCol="0" anchor="ctr">
-            <a:normAutofit/>
-          </a:bodyPr>
-          <a:lstStyle/>
-          <a:p>
-            <a:pPr algn="ctr" indent="0" marL="0">
-              <a:buNone/>
-            </a:pPr>
-            <a:r>
-              <a:rPr lang="en-US" sz="3600" b="1" dirty="0">
-                <a:solidFill>
-                  <a:srgbClr val="990011"/>
-                </a:solidFill>
-                <a:latin typeface="Times New Roman" pitchFamily="34" charset="0"/>
-                <a:ea typeface="Times New Roman" pitchFamily="34" charset="-122"/>
-                <a:cs typeface="Times New Roman" pitchFamily="34" charset="-120"/>
-              </a:rPr>
-              <a:t>Correction: Possible Answer</a:t>
-            </a:r>
-            <a:endParaRPr lang="en-US" sz="3600" dirty="0"/>
-          </a:p>
-        </p:txBody>
-      </p:sp>
-      <p:sp>
-        <p:nvSpPr>
-          <p:cNvPr id="5" name="Text 2"/>
-          <p:cNvSpPr/>
-          <p:nvPr/>
-        </p:nvSpPr>
-        <p:spPr>
-          <a:xfrm>
-            <a:off x="5349240" y="1783080"/>
-            <a:ext cx="6522415" cy="4663440"/>
-          </a:xfrm>
-          <a:prstGeom prst="rect">
-            <a:avLst/>
-          </a:prstGeom>
-          <a:noFill/>
-          <a:ln/>
-        </p:spPr>
-        <p:txBody>
-          <a:bodyPr wrap="square" lIns="0" tIns="0" rIns="0" bIns="0" rtlCol="0" anchor="t"/>
-          <a:lstStyle/>
-          <a:p>
-            <a:pPr algn="l" indent="0" marL="0">
-              <a:spcAft>
-                <a:spcPts val="800"/>
-              </a:spcAft>
-              <a:buNone/>
-            </a:pPr>
-            <a:r>
-              <a:rPr lang="en-US" sz="4000" dirty="0">
-                <a:solidFill>
-                  <a:srgbClr val="111111"/>
-                </a:solidFill>
-                <a:latin typeface="Times New Roman" pitchFamily="34" charset="0"/>
-                <a:ea typeface="Times New Roman" pitchFamily="34" charset="-122"/>
-                <a:cs typeface="Times New Roman" pitchFamily="34" charset="-120"/>
-              </a:rPr>
-              <a:t>Africa is surrounded by the Atlantic Ocean (west), the Indian Ocean (east), the Mediterranean Sea (north) and the Red Sea (north-east).</a:t>
-            </a:r>
-            <a:endParaRPr lang="en-US" sz="4000" dirty="0"/>
-          </a:p>
-        </p:txBody>
-      </p:sp>
-      <p:sp>
-        <p:nvSpPr>
-          <p:cNvPr id="25" name="Slide Number Placeholder 0"/>
-          <p:cNvSpPr>
-            <a:spLocks noGrp="1"/>
-          </p:cNvSpPr>
-          <p:nvPr>
-            <p:ph type="sldNum" sz="quarter" idx="4294967295"/>
-          </p:nvPr>
-        </p:nvSpPr>
-        <p:spPr>
-          <a:xfrm>
-            <a:off x="27432" y="91440"/>
-            <a:ext cx="585216" cy="475488"/>
-          </a:xfrm>
-          <a:prstGeom prst="rect">
-            <a:avLst/>
-          </a:prstGeom>
-          <a:extLst>
-            <a:ext uri="{C572A759-6A51-4108-AA02-DFA0A04FC94B}">
-              <ma14:wrappingTextBoxFlag xmlns:ma14="http://schemas.microsoft.com/office/mac/drawingml/2011/main" val="0"/>
-            </a:ext>
-          </a:extLst>
-        </p:spPr>
-        <p:txBody>
-          <a:bodyPr/>
-          <a:lstStyle>
-            <a:lvl1pPr>
-              <a:defRPr sz="2000">
-                <a:solidFill>
-                  <a:srgbClr val="FFFFFF"/>
-                </a:solidFill>
-                <a:latin typeface="Calibri"/>
-                <a:ea typeface="Calibri"/>
-                <a:cs typeface="Calibri"/>
-              </a:defRPr>
-            </a:lvl1pPr>
-          </a:lstStyle>
-          <a:p>
-            <a:pPr algn="ctr"/>
-            <a:fld id="{F7021451-1387-4CA6-816F-3879F97B5CBC}" type="slidenum">
-              <a:rPr b="1" lang="en-US"/>
-              <a:t>5</a:t>
-            </a:fld>
-            <a:endParaRPr lang="en-US"/>
-          </a:p>
-        </p:txBody>
-      </p:sp>
-    </p:spTree>
-  </p:cSld>
-  <p:clrMapOvr>
-    <a:masterClrMapping/>
-  </p:clrMapOvr>
-</p:sld>
-</file>
-
-<file path=ppt/slides/slide50.xml><?xml version="1.0" encoding="utf-8"?>
-<p:sld xmlns:a="http://schemas.openxmlformats.org/drawingml/2006/main" xmlns:r="http://schemas.openxmlformats.org/officeDocument/2006/relationships" xmlns:p="http://schemas.openxmlformats.org/presentationml/2006/main">
-  <p:cSld name="Slide 50">
-    <p:spTree>
-      <p:nvGrpSpPr>
-        <p:cNvPr id="1" name=""/>
-        <p:cNvGrpSpPr/>
-        <p:nvPr/>
-      </p:nvGrpSpPr>
-      <p:grpSpPr>
-        <a:xfrm>
-          <a:off x="0" y="0"/>
-          <a:ext cx="0" cy="0"/>
-          <a:chOff x="0" y="0"/>
-          <a:chExt cx="0" cy="0"/>
-        </a:xfrm>
-      </p:grpSpPr>
-      <p:sp>
-        <p:nvSpPr>
-          <p:cNvPr id="2" name="Text 0"/>
-          <p:cNvSpPr/>
-          <p:nvPr/>
-        </p:nvSpPr>
-        <p:spPr>
-          <a:xfrm>
-            <a:off x="457200" y="713232"/>
-            <a:ext cx="11368735" cy="274320"/>
-          </a:xfrm>
-          <a:prstGeom prst="rect">
-            <a:avLst/>
-          </a:prstGeom>
-          <a:noFill/>
-          <a:ln/>
-        </p:spPr>
-        <p:txBody>
-          <a:bodyPr wrap="square" lIns="0" tIns="0" rIns="0" bIns="0" rtlCol="0" anchor="ctr"/>
-          <a:lstStyle/>
-          <a:p>
-            <a:pPr algn="r" indent="0" marL="0">
-              <a:buNone/>
-            </a:pPr>
-            <a:r>
-              <a:rPr lang="en-US" sz="1400" b="1" dirty="0">
-                <a:solidFill>
-                  <a:srgbClr val="1C3F6E"/>
-                </a:solidFill>
-                <a:latin typeface="Calibri" pitchFamily="34" charset="0"/>
-                <a:ea typeface="Calibri" pitchFamily="34" charset="-122"/>
-                <a:cs typeface="Calibri" pitchFamily="34" charset="-120"/>
-              </a:rPr>
               <a:t>LOGBOOK</a:t>
             </a:r>
             <a:endParaRPr lang="en-US" sz="1400" dirty="0"/>
@@ -19411,7 +19899,7 @@
       </p:sp>
       <p:graphicFrame>
         <p:nvGraphicFramePr>
-          <p:cNvPr id="51" name="Table 0"/>
+          <p:cNvPr id="52" name="Table 0"/>
           <p:cNvGraphicFramePr>
             <a:graphicFrameLocks noGrp="1"/>
           </p:cNvGraphicFramePr>
@@ -19521,7 +20009,7 @@
                           <a:ea typeface="Calibri" pitchFamily="34" charset="-122"/>
                           <a:cs typeface="Calibri" pitchFamily="34" charset="-120"/>
                         </a:rPr>
-                        <a:t>DEFINITIONS; Location and Size; Physical Characteristics.</a:t>
+                        <a:t>DEFINITIONS; Location; Physical Characteristics.</a:t>
                       </a:r>
                       <a:endParaRPr lang="en-US" sz="1600" dirty="0">
                         <a:latin typeface="Calibri" charset="0"/>
@@ -20171,331 +20659,6 @@
             <a:pPr algn="ctr"/>
             <a:fld id="{F7021451-1387-4CA6-816F-3879F97B5CBC}" type="slidenum">
               <a:rPr b="1" lang="en-US"/>
-              <a:t>50</a:t>
-            </a:fld>
-            <a:endParaRPr lang="en-US"/>
-          </a:p>
-        </p:txBody>
-      </p:sp>
-    </p:spTree>
-  </p:cSld>
-  <p:clrMapOvr>
-    <a:masterClrMapping/>
-  </p:clrMapOvr>
-</p:sld>
-</file>
-
-<file path=ppt/slides/slide51.xml><?xml version="1.0" encoding="utf-8"?>
-<p:sld xmlns:a="http://schemas.openxmlformats.org/drawingml/2006/main" xmlns:r="http://schemas.openxmlformats.org/officeDocument/2006/relationships" xmlns:p="http://schemas.openxmlformats.org/presentationml/2006/main">
-  <p:cSld name="Slide 51">
-    <p:spTree>
-      <p:nvGrpSpPr>
-        <p:cNvPr id="1" name=""/>
-        <p:cNvGrpSpPr/>
-        <p:nvPr/>
-      </p:nvGrpSpPr>
-      <p:grpSpPr>
-        <a:xfrm>
-          <a:off x="0" y="0"/>
-          <a:ext cx="0" cy="0"/>
-          <a:chOff x="0" y="0"/>
-          <a:chExt cx="0" cy="0"/>
-        </a:xfrm>
-      </p:grpSpPr>
-      <p:sp>
-        <p:nvSpPr>
-          <p:cNvPr id="2" name="Text 0"/>
-          <p:cNvSpPr/>
-          <p:nvPr/>
-        </p:nvSpPr>
-        <p:spPr>
-          <a:xfrm>
-            <a:off x="457200" y="713232"/>
-            <a:ext cx="11368735" cy="274320"/>
-          </a:xfrm>
-          <a:prstGeom prst="rect">
-            <a:avLst/>
-          </a:prstGeom>
-          <a:noFill/>
-          <a:ln/>
-        </p:spPr>
-        <p:txBody>
-          <a:bodyPr wrap="square" lIns="0" tIns="0" rIns="0" bIns="0" rtlCol="0" anchor="ctr"/>
-          <a:lstStyle/>
-          <a:p>
-            <a:pPr algn="r" indent="0" marL="0">
-              <a:buNone/>
-            </a:pPr>
-            <a:r>
-              <a:rPr lang="en-US" sz="1400" b="1" dirty="0">
-                <a:solidFill>
-                  <a:srgbClr val="1C3F6E"/>
-                </a:solidFill>
-                <a:latin typeface="Calibri" pitchFamily="34" charset="0"/>
-                <a:ea typeface="Calibri" pitchFamily="34" charset="-122"/>
-                <a:cs typeface="Calibri" pitchFamily="34" charset="-120"/>
-              </a:rPr>
-              <a:t>TEACHER'S NOTE</a:t>
-            </a:r>
-            <a:endParaRPr lang="en-US" sz="1400" dirty="0"/>
-          </a:p>
-        </p:txBody>
-      </p:sp>
-      <p:pic>
-        <p:nvPicPr>
-          <p:cNvPr id="3" name="Image 0" descr="/home/claude/f4/img/minesec_sheet.png">    </p:cNvPr>
-          <p:cNvPicPr>
-            <a:picLocks noChangeAspect="1"/>
-          </p:cNvPicPr>
-          <p:nvPr/>
-        </p:nvPicPr>
-        <p:blipFill>
-          <a:blip r:embed="rId1"/>
-          <a:stretch>
-            <a:fillRect/>
-          </a:stretch>
-        </p:blipFill>
-        <p:spPr>
-          <a:xfrm>
-            <a:off x="0" y="658368"/>
-            <a:ext cx="3840480" cy="5833872"/>
-          </a:xfrm>
-          <a:prstGeom prst="rect">
-            <a:avLst/>
-          </a:prstGeom>
-        </p:spPr>
-      </p:pic>
-      <p:sp>
-        <p:nvSpPr>
-          <p:cNvPr id="4" name="Text 1"/>
-          <p:cNvSpPr/>
-          <p:nvPr/>
-        </p:nvSpPr>
-        <p:spPr>
-          <a:xfrm>
-            <a:off x="4069080" y="1005840"/>
-            <a:ext cx="7802575" cy="731520"/>
-          </a:xfrm>
-          <a:prstGeom prst="rect">
-            <a:avLst/>
-          </a:prstGeom>
-          <a:noFill/>
-          <a:ln/>
-        </p:spPr>
-        <p:txBody>
-          <a:bodyPr wrap="square" lIns="0" tIns="0" rIns="0" bIns="0" rtlCol="0" anchor="ctr">
-            <a:normAutofit/>
-          </a:bodyPr>
-          <a:lstStyle/>
-          <a:p>
-            <a:pPr algn="ctr" indent="0" marL="0">
-              <a:buNone/>
-            </a:pPr>
-            <a:r>
-              <a:rPr lang="en-US" sz="3600" b="1" dirty="0">
-                <a:solidFill>
-                  <a:srgbClr val="990011"/>
-                </a:solidFill>
-                <a:latin typeface="Times New Roman" pitchFamily="34" charset="0"/>
-                <a:ea typeface="Times New Roman" pitchFamily="34" charset="-122"/>
-                <a:cs typeface="Times New Roman" pitchFamily="34" charset="-120"/>
-              </a:rPr>
-              <a:t>Teacher's Note</a:t>
-            </a:r>
-            <a:endParaRPr lang="en-US" sz="3600" dirty="0"/>
-          </a:p>
-        </p:txBody>
-      </p:sp>
-      <p:sp>
-        <p:nvSpPr>
-          <p:cNvPr id="5" name="Text 2"/>
-          <p:cNvSpPr/>
-          <p:nvPr/>
-        </p:nvSpPr>
-        <p:spPr>
-          <a:xfrm>
-            <a:off x="4069080" y="1783080"/>
-            <a:ext cx="7802575" cy="4663440"/>
-          </a:xfrm>
-          <a:prstGeom prst="rect">
-            <a:avLst/>
-          </a:prstGeom>
-          <a:noFill/>
-          <a:ln/>
-        </p:spPr>
-        <p:txBody>
-          <a:bodyPr wrap="square" lIns="0" tIns="0" rIns="0" bIns="0" rtlCol="0" anchor="t"/>
-          <a:lstStyle/>
-          <a:p>
-            <a:pPr algn="l" marL="342900" indent="-342900">
-              <a:spcAft>
-                <a:spcPts val="800"/>
-              </a:spcAft>
-              <a:buSzPct val="100000"/>
-              <a:buChar char="•"/>
-            </a:pPr>
-            <a:r>
-              <a:rPr lang="en-US" sz="2000" dirty="0">
-                <a:solidFill>
-                  <a:srgbClr val="111111"/>
-                </a:solidFill>
-                <a:latin typeface="Calibri" pitchFamily="34" charset="0"/>
-                <a:ea typeface="Calibri" pitchFamily="34" charset="-122"/>
-                <a:cs typeface="Calibri" pitchFamily="34" charset="-120"/>
-              </a:rPr>
-              <a:t>Timing: Homework correction, plan, objectives 8 min | Recall, situation, action 10 min | 5 activities 30 min | Board summary (copying) 30 min | Evaluation, remediation 10 min | Homework, next lesson 5 min | Logbook 7 min</a:t>
-            </a:r>
-            <a:endParaRPr lang="en-US" sz="2000" dirty="0"/>
-          </a:p>
-          <a:p>
-            <a:pPr algn="l" marL="342900" indent="-342900">
-              <a:spcAft>
-                <a:spcPts val="800"/>
-              </a:spcAft>
-              <a:buSzPct val="100000"/>
-              <a:buChar char="•"/>
-            </a:pPr>
-            <a:r>
-              <a:rPr lang="en-US" sz="2000" dirty="0">
-                <a:solidFill>
-                  <a:srgbClr val="111111"/>
-                </a:solidFill>
-                <a:latin typeface="Calibri" pitchFamily="34" charset="0"/>
-                <a:ea typeface="Calibri" pitchFamily="34" charset="-122"/>
-                <a:cs typeface="Calibri" pitchFamily="34" charset="-120"/>
-              </a:rPr>
-              <a:t>Without the projector (Activity 1): draw Africa on the board and write the four names around it.</a:t>
-            </a:r>
-            <a:endParaRPr lang="en-US" sz="2000" dirty="0"/>
-          </a:p>
-          <a:p>
-            <a:pPr algn="l" marL="342900" indent="-342900">
-              <a:spcAft>
-                <a:spcPts val="800"/>
-              </a:spcAft>
-              <a:buSzPct val="100000"/>
-              <a:buChar char="•"/>
-            </a:pPr>
-            <a:r>
-              <a:rPr lang="en-US" sz="2000" dirty="0">
-                <a:solidFill>
-                  <a:srgbClr val="111111"/>
-                </a:solidFill>
-                <a:latin typeface="Calibri" pitchFamily="34" charset="0"/>
-                <a:ea typeface="Calibri" pitchFamily="34" charset="-122"/>
-                <a:cs typeface="Calibri" pitchFamily="34" charset="-120"/>
-              </a:rPr>
-              <a:t>Without the projector (Activity 2): explain: a canal is a river dug by people.</a:t>
-            </a:r>
-            <a:endParaRPr lang="en-US" sz="2000" dirty="0"/>
-          </a:p>
-          <a:p>
-            <a:pPr algn="l" marL="342900" indent="-342900">
-              <a:spcAft>
-                <a:spcPts val="800"/>
-              </a:spcAft>
-              <a:buSzPct val="100000"/>
-              <a:buChar char="•"/>
-            </a:pPr>
-            <a:r>
-              <a:rPr lang="en-US" sz="2000" dirty="0">
-                <a:solidFill>
-                  <a:srgbClr val="111111"/>
-                </a:solidFill>
-                <a:latin typeface="Calibri" pitchFamily="34" charset="0"/>
-                <a:ea typeface="Calibri" pitchFamily="34" charset="-122"/>
-                <a:cs typeface="Calibri" pitchFamily="34" charset="-120"/>
-              </a:rPr>
-              <a:t>Without the projector (Activity 3): compare with the Adamawa plateau.</a:t>
-            </a:r>
-            <a:endParaRPr lang="en-US" sz="2000" dirty="0"/>
-          </a:p>
-          <a:p>
-            <a:pPr algn="l" marL="342900" indent="-342900">
-              <a:spcAft>
-                <a:spcPts val="800"/>
-              </a:spcAft>
-              <a:buSzPct val="100000"/>
-              <a:buChar char="•"/>
-            </a:pPr>
-            <a:r>
-              <a:rPr lang="en-US" sz="2000" dirty="0">
-                <a:solidFill>
-                  <a:srgbClr val="111111"/>
-                </a:solidFill>
-                <a:latin typeface="Calibri" pitchFamily="34" charset="0"/>
-                <a:ea typeface="Calibri" pitchFamily="34" charset="-122"/>
-                <a:cs typeface="Calibri" pitchFamily="34" charset="-120"/>
-              </a:rPr>
-              <a:t>Without the projector (Activity 4): compare with Mount Cameroon (4,095 m).</a:t>
-            </a:r>
-            <a:endParaRPr lang="en-US" sz="2000" dirty="0"/>
-          </a:p>
-          <a:p>
-            <a:pPr algn="l" marL="342900" indent="-342900">
-              <a:spcAft>
-                <a:spcPts val="800"/>
-              </a:spcAft>
-              <a:buSzPct val="100000"/>
-              <a:buChar char="•"/>
-            </a:pPr>
-            <a:r>
-              <a:rPr lang="en-US" sz="2000" dirty="0">
-                <a:solidFill>
-                  <a:srgbClr val="111111"/>
-                </a:solidFill>
-                <a:latin typeface="Calibri" pitchFamily="34" charset="0"/>
-                <a:ea typeface="Calibri" pitchFamily="34" charset="-122"/>
-                <a:cs typeface="Calibri" pitchFamily="34" charset="-120"/>
-              </a:rPr>
-              <a:t>Without the projector (Activity 5): find the Nile in the atlas.</a:t>
-            </a:r>
-            <a:endParaRPr lang="en-US" sz="2000" dirty="0"/>
-          </a:p>
-        </p:txBody>
-      </p:sp>
-      <p:sp>
-        <p:nvSpPr>
-          <p:cNvPr id="25" name="Slide Number Placeholder 0"/>
-          <p:cNvSpPr>
-            <a:spLocks noGrp="1"/>
-          </p:cNvSpPr>
-          <p:nvPr>
-            <p:ph type="sldNum" sz="quarter" idx="4294967295"/>
-          </p:nvPr>
-        </p:nvSpPr>
-        <p:spPr>
-          <a:xfrm>
-            <a:off x="27432" y="91440"/>
-            <a:ext cx="585216" cy="475488"/>
-          </a:xfrm>
-          <a:prstGeom prst="rect">
-            <a:avLst/>
-          </a:prstGeom>
-          <a:extLst>
-            <a:ext uri="{C572A759-6A51-4108-AA02-DFA0A04FC94B}">
-              <ma14:wrappingTextBoxFlag xmlns:ma14="http://schemas.microsoft.com/office/mac/drawingml/2011/main" val="0"/>
-            </a:ext>
-          </a:extLst>
-        </p:spPr>
-        <p:txBody>
-          <a:bodyPr/>
-          <a:lstStyle>
-            <a:lvl1pPr>
-              <a:defRPr sz="2000">
-                <a:solidFill>
-                  <a:srgbClr val="FFFFFF"/>
-                </a:solidFill>
-                <a:latin typeface="Calibri"/>
-                <a:ea typeface="Calibri"/>
-                <a:cs typeface="Calibri"/>
-              </a:defRPr>
-            </a:lvl1pPr>
-          </a:lstStyle>
-          <a:p>
-            <a:pPr algn="ctr"/>
-            <a:fld id="{F7021451-1387-4CA6-816F-3879F97B5CBC}" type="slidenum">
-              <a:rPr b="1" lang="en-US"/>
               <a:t>51</a:t>
             </a:fld>
             <a:endParaRPr lang="en-US"/>
@@ -20560,7 +20723,7 @@
                 <a:ea typeface="Calibri" pitchFamily="34" charset="-122"/>
                 <a:cs typeface="Calibri" pitchFamily="34" charset="-120"/>
               </a:rPr>
-              <a:t>REFERENCES</a:t>
+              <a:t>TEACHER'S NOTE</a:t>
             </a:r>
             <a:endParaRPr lang="en-US" sz="1400" dirty="0"/>
           </a:p>
@@ -20583,7 +20746,7 @@
         <p:spPr>
           <a:xfrm>
             <a:off x="0" y="658368"/>
-            <a:ext cx="5120640" cy="5833872"/>
+            <a:ext cx="3840480" cy="5833872"/>
           </a:xfrm>
           <a:prstGeom prst="rect">
             <a:avLst/>
@@ -20598,8 +20761,8 @@
         </p:nvSpPr>
         <p:spPr>
           <a:xfrm>
-            <a:off x="5349240" y="1005840"/>
-            <a:ext cx="6522415" cy="731520"/>
+            <a:off x="4069080" y="1005840"/>
+            <a:ext cx="7802575" cy="731520"/>
           </a:xfrm>
           <a:prstGeom prst="rect">
             <a:avLst/>
@@ -20625,7 +20788,7 @@
                 <a:ea typeface="Times New Roman" pitchFamily="34" charset="-122"/>
                 <a:cs typeface="Times New Roman" pitchFamily="34" charset="-120"/>
               </a:rPr>
-              <a:t>References</a:t>
+              <a:t>Teacher's Note</a:t>
             </a:r>
             <a:endParaRPr lang="en-US" sz="3600" dirty="0"/>
           </a:p>
@@ -20639,8 +20802,8 @@
         </p:nvSpPr>
         <p:spPr>
           <a:xfrm>
-            <a:off x="5349240" y="1783080"/>
-            <a:ext cx="6522415" cy="4663440"/>
+            <a:off x="4069080" y="1783080"/>
+            <a:ext cx="7802575" cy="4663440"/>
           </a:xfrm>
           <a:prstGeom prst="rect">
             <a:avLst/>
@@ -20660,7 +20823,7 @@
               <a:buChar char="•"/>
             </a:pPr>
             <a:r>
-              <a:rPr lang="en-US" sz="1800" dirty="0">
+              <a:rPr lang="en-US" sz="2000" dirty="0">
                 <a:solidFill>
                   <a:srgbClr val="111111"/>
                 </a:solidFill>
@@ -20668,9 +20831,9 @@
                 <a:ea typeface="Calibri" pitchFamily="34" charset="-122"/>
                 <a:cs typeface="Calibri" pitchFamily="34" charset="-120"/>
               </a:rPr>
-              <a:t>Harmonised Progression Sheet, Economic Geography (5051), Form 2.</a:t>
-            </a:r>
-            <a:endParaRPr lang="en-US" sz="1800" dirty="0"/>
+              <a:t>Timing: Homework correction, plan, objectives 8 min | Recall, situation, action 10 min | 5 activities 30 min | Board summary (copying) 30 min | Evaluation, remediation 10 min | Homework, next lesson 5 min | Logbook 7 min</a:t>
+            </a:r>
+            <a:endParaRPr lang="en-US" sz="2000" dirty="0"/>
           </a:p>
           <a:p>
             <a:pPr algn="l" marL="342900" indent="-342900">
@@ -20681,7 +20844,7 @@
               <a:buChar char="•"/>
             </a:pPr>
             <a:r>
-              <a:rPr lang="en-US" sz="1800" dirty="0">
+              <a:rPr lang="en-US" sz="2000" dirty="0">
                 <a:solidFill>
                   <a:srgbClr val="111111"/>
                 </a:solidFill>
@@ -20689,9 +20852,9 @@
                 <a:ea typeface="Calibri" pitchFamily="34" charset="-122"/>
                 <a:cs typeface="Calibri" pitchFamily="34" charset="-120"/>
               </a:rPr>
-              <a:t>Photo, Activity 2: “MV Maersk Taikung” by tim.md, CC BY-NC-ND 2.0, via Flickr (https://www.flickr.com/photos/50299151@N00/3252980648)</a:t>
-            </a:r>
-            <a:endParaRPr lang="en-US" sz="1800" dirty="0"/>
+              <a:t>Without the projector (Activity 1): draw Africa on the board.</a:t>
+            </a:r>
+            <a:endParaRPr lang="en-US" sz="2000" dirty="0"/>
           </a:p>
           <a:p>
             <a:pPr algn="l" marL="342900" indent="-342900">
@@ -20702,7 +20865,7 @@
               <a:buChar char="•"/>
             </a:pPr>
             <a:r>
-              <a:rPr lang="en-US" sz="1800" dirty="0">
+              <a:rPr lang="en-US" sz="2000" dirty="0">
                 <a:solidFill>
                   <a:srgbClr val="111111"/>
                 </a:solidFill>
@@ -20710,9 +20873,9 @@
                 <a:ea typeface="Calibri" pitchFamily="34" charset="-122"/>
                 <a:cs typeface="Calibri" pitchFamily="34" charset="-120"/>
               </a:rPr>
-              <a:t>Photo, Activity 4: “Kilimanjaro” by ian 1602, CC BY-NC 2.0, via Flickr (https://www.flickr.com/photos/98181641@N00/2179855841)</a:t>
-            </a:r>
-            <a:endParaRPr lang="en-US" sz="1800" dirty="0"/>
+              <a:t>Without the projector (Activity 2): show the Suez Canal on a map.</a:t>
+            </a:r>
+            <a:endParaRPr lang="en-US" sz="2000" dirty="0"/>
           </a:p>
           <a:p>
             <a:pPr algn="l" marL="342900" indent="-342900">
@@ -20723,7 +20886,7 @@
               <a:buChar char="•"/>
             </a:pPr>
             <a:r>
-              <a:rPr lang="en-US" sz="1800" dirty="0">
+              <a:rPr lang="en-US" sz="2000" dirty="0">
                 <a:solidFill>
                   <a:srgbClr val="111111"/>
                 </a:solidFill>
@@ -20731,9 +20894,9 @@
                 <a:ea typeface="Calibri" pitchFamily="34" charset="-122"/>
                 <a:cs typeface="Calibri" pitchFamily="34" charset="-120"/>
               </a:rPr>
-              <a:t>Photo, Activity 5: “Egypt-5B-023 - Approaching Aswan” by archer10 (Dennis), CC BY-SA 2.0, via Flickr (https://www.flickr.com/photos/22490717@N02/2217394088)</a:t>
-            </a:r>
-            <a:endParaRPr lang="en-US" sz="1800" dirty="0"/>
+              <a:t>Without the projector (Activity 3): describe the Adamawa plateau.</a:t>
+            </a:r>
+            <a:endParaRPr lang="en-US" sz="2000" dirty="0"/>
           </a:p>
           <a:p>
             <a:pPr algn="l" marL="342900" indent="-342900">
@@ -20744,7 +20907,7 @@
               <a:buChar char="•"/>
             </a:pPr>
             <a:r>
-              <a:rPr lang="en-US" sz="1800" dirty="0">
+              <a:rPr lang="en-US" sz="2000" dirty="0">
                 <a:solidFill>
                   <a:srgbClr val="111111"/>
                 </a:solidFill>
@@ -20752,9 +20915,30 @@
                 <a:ea typeface="Calibri" pitchFamily="34" charset="-122"/>
                 <a:cs typeface="Calibri" pitchFamily="34" charset="-120"/>
               </a:rPr>
-              <a:t>Diagrams and animations: drawn for this lesson (Geography Department).</a:t>
-            </a:r>
-            <a:endParaRPr lang="en-US" sz="1800" dirty="0"/>
+              <a:t>Without the projector (Activity 4): compare with Mount Cameroon.</a:t>
+            </a:r>
+            <a:endParaRPr lang="en-US" sz="2000" dirty="0"/>
+          </a:p>
+          <a:p>
+            <a:pPr algn="l" marL="342900" indent="-342900">
+              <a:spcAft>
+                <a:spcPts val="800"/>
+              </a:spcAft>
+              <a:buSzPct val="100000"/>
+              <a:buChar char="•"/>
+            </a:pPr>
+            <a:r>
+              <a:rPr lang="en-US" sz="2000" dirty="0">
+                <a:solidFill>
+                  <a:srgbClr val="111111"/>
+                </a:solidFill>
+                <a:latin typeface="Calibri" pitchFamily="34" charset="0"/>
+                <a:ea typeface="Calibri" pitchFamily="34" charset="-122"/>
+                <a:cs typeface="Calibri" pitchFamily="34" charset="-120"/>
+              </a:rPr>
+              <a:t>Without the projector (Activity 5): show the Nile on a map.</a:t>
+            </a:r>
+            <a:endParaRPr lang="en-US" sz="2000" dirty="0"/>
           </a:p>
         </p:txBody>
       </p:sp>
@@ -20801,6 +20985,310 @@
             <a:fld id="{F7021451-1387-4CA6-816F-3879F97B5CBC}" type="slidenum">
               <a:rPr b="1" lang="en-US"/>
               <a:t>52</a:t>
+            </a:fld>
+            <a:endParaRPr lang="en-US"/>
+          </a:p>
+        </p:txBody>
+      </p:sp>
+    </p:spTree>
+  </p:cSld>
+  <p:clrMapOvr>
+    <a:masterClrMapping/>
+  </p:clrMapOvr>
+</p:sld>
+</file>
+
+<file path=ppt/slides/slide53.xml><?xml version="1.0" encoding="utf-8"?>
+<p:sld xmlns:a="http://schemas.openxmlformats.org/drawingml/2006/main" xmlns:r="http://schemas.openxmlformats.org/officeDocument/2006/relationships" xmlns:p="http://schemas.openxmlformats.org/presentationml/2006/main">
+  <p:cSld name="Slide 53">
+    <p:spTree>
+      <p:nvGrpSpPr>
+        <p:cNvPr id="1" name=""/>
+        <p:cNvGrpSpPr/>
+        <p:nvPr/>
+      </p:nvGrpSpPr>
+      <p:grpSpPr>
+        <a:xfrm>
+          <a:off x="0" y="0"/>
+          <a:ext cx="0" cy="0"/>
+          <a:chOff x="0" y="0"/>
+          <a:chExt cx="0" cy="0"/>
+        </a:xfrm>
+      </p:grpSpPr>
+      <p:sp>
+        <p:nvSpPr>
+          <p:cNvPr id="2" name="Text 0"/>
+          <p:cNvSpPr/>
+          <p:nvPr/>
+        </p:nvSpPr>
+        <p:spPr>
+          <a:xfrm>
+            <a:off x="457200" y="713232"/>
+            <a:ext cx="11368735" cy="274320"/>
+          </a:xfrm>
+          <a:prstGeom prst="rect">
+            <a:avLst/>
+          </a:prstGeom>
+          <a:noFill/>
+          <a:ln/>
+        </p:spPr>
+        <p:txBody>
+          <a:bodyPr wrap="square" lIns="0" tIns="0" rIns="0" bIns="0" rtlCol="0" anchor="ctr"/>
+          <a:lstStyle/>
+          <a:p>
+            <a:pPr algn="r" indent="0" marL="0">
+              <a:buNone/>
+            </a:pPr>
+            <a:r>
+              <a:rPr lang="en-US" sz="1400" b="1" dirty="0">
+                <a:solidFill>
+                  <a:srgbClr val="1C3F6E"/>
+                </a:solidFill>
+                <a:latin typeface="Calibri" pitchFamily="34" charset="0"/>
+                <a:ea typeface="Calibri" pitchFamily="34" charset="-122"/>
+                <a:cs typeface="Calibri" pitchFamily="34" charset="-120"/>
+              </a:rPr>
+              <a:t>REFERENCES</a:t>
+            </a:r>
+            <a:endParaRPr lang="en-US" sz="1400" dirty="0"/>
+          </a:p>
+        </p:txBody>
+      </p:sp>
+      <p:pic>
+        <p:nvPicPr>
+          <p:cNvPr id="3" name="Image 0" descr="/home/claude/f4/img/minesec_sheet.png">    </p:cNvPr>
+          <p:cNvPicPr>
+            <a:picLocks noChangeAspect="1"/>
+          </p:cNvPicPr>
+          <p:nvPr/>
+        </p:nvPicPr>
+        <p:blipFill>
+          <a:blip r:embed="rId1"/>
+          <a:stretch>
+            <a:fillRect/>
+          </a:stretch>
+        </p:blipFill>
+        <p:spPr>
+          <a:xfrm>
+            <a:off x="0" y="658368"/>
+            <a:ext cx="5120640" cy="5833872"/>
+          </a:xfrm>
+          <a:prstGeom prst="rect">
+            <a:avLst/>
+          </a:prstGeom>
+        </p:spPr>
+      </p:pic>
+      <p:sp>
+        <p:nvSpPr>
+          <p:cNvPr id="4" name="Text 1"/>
+          <p:cNvSpPr/>
+          <p:nvPr/>
+        </p:nvSpPr>
+        <p:spPr>
+          <a:xfrm>
+            <a:off x="5349240" y="1005840"/>
+            <a:ext cx="6522415" cy="731520"/>
+          </a:xfrm>
+          <a:prstGeom prst="rect">
+            <a:avLst/>
+          </a:prstGeom>
+          <a:noFill/>
+          <a:ln/>
+        </p:spPr>
+        <p:txBody>
+          <a:bodyPr wrap="square" lIns="0" tIns="0" rIns="0" bIns="0" rtlCol="0" anchor="ctr">
+            <a:normAutofit/>
+          </a:bodyPr>
+          <a:lstStyle/>
+          <a:p>
+            <a:pPr algn="ctr" indent="0" marL="0">
+              <a:buNone/>
+            </a:pPr>
+            <a:r>
+              <a:rPr lang="en-US" sz="3600" b="1" dirty="0">
+                <a:solidFill>
+                  <a:srgbClr val="990011"/>
+                </a:solidFill>
+                <a:latin typeface="Times New Roman" pitchFamily="34" charset="0"/>
+                <a:ea typeface="Times New Roman" pitchFamily="34" charset="-122"/>
+                <a:cs typeface="Times New Roman" pitchFamily="34" charset="-120"/>
+              </a:rPr>
+              <a:t>References</a:t>
+            </a:r>
+            <a:endParaRPr lang="en-US" sz="3600" dirty="0"/>
+          </a:p>
+        </p:txBody>
+      </p:sp>
+      <p:sp>
+        <p:nvSpPr>
+          <p:cNvPr id="5" name="Text 2"/>
+          <p:cNvSpPr/>
+          <p:nvPr/>
+        </p:nvSpPr>
+        <p:spPr>
+          <a:xfrm>
+            <a:off x="5349240" y="1783080"/>
+            <a:ext cx="6522415" cy="4663440"/>
+          </a:xfrm>
+          <a:prstGeom prst="rect">
+            <a:avLst/>
+          </a:prstGeom>
+          <a:noFill/>
+          <a:ln/>
+        </p:spPr>
+        <p:txBody>
+          <a:bodyPr wrap="square" lIns="0" tIns="0" rIns="0" bIns="0" rtlCol="0" anchor="t"/>
+          <a:lstStyle/>
+          <a:p>
+            <a:pPr algn="l" marL="342900" indent="-342900">
+              <a:spcAft>
+                <a:spcPts val="800"/>
+              </a:spcAft>
+              <a:buSzPct val="100000"/>
+              <a:buChar char="•"/>
+            </a:pPr>
+            <a:r>
+              <a:rPr lang="en-US" sz="1800" dirty="0">
+                <a:solidFill>
+                  <a:srgbClr val="111111"/>
+                </a:solidFill>
+                <a:latin typeface="Calibri" pitchFamily="34" charset="0"/>
+                <a:ea typeface="Calibri" pitchFamily="34" charset="-122"/>
+                <a:cs typeface="Calibri" pitchFamily="34" charset="-120"/>
+              </a:rPr>
+              <a:t>Harmonised Progression Sheet, Economic Geography (5051), Form 2.</a:t>
+            </a:r>
+            <a:endParaRPr lang="en-US" sz="1800" dirty="0"/>
+          </a:p>
+          <a:p>
+            <a:pPr algn="l" marL="342900" indent="-342900">
+              <a:spcAft>
+                <a:spcPts val="800"/>
+              </a:spcAft>
+              <a:buSzPct val="100000"/>
+              <a:buChar char="•"/>
+            </a:pPr>
+            <a:r>
+              <a:rPr lang="en-US" sz="1800" dirty="0">
+                <a:solidFill>
+                  <a:srgbClr val="111111"/>
+                </a:solidFill>
+                <a:latin typeface="Calibri" pitchFamily="34" charset="0"/>
+                <a:ea typeface="Calibri" pitchFamily="34" charset="-122"/>
+                <a:cs typeface="Calibri" pitchFamily="34" charset="-120"/>
+              </a:rPr>
+              <a:t>Photo, Activity 2: “MV Maersk Taikung” by tim.md, CC BY-NC-ND 2.0, via Flickr (https://www.flickr.com/photos/50299151@N00/3252980648)</a:t>
+            </a:r>
+            <a:endParaRPr lang="en-US" sz="1800" dirty="0"/>
+          </a:p>
+          <a:p>
+            <a:pPr algn="l" marL="342900" indent="-342900">
+              <a:spcAft>
+                <a:spcPts val="800"/>
+              </a:spcAft>
+              <a:buSzPct val="100000"/>
+              <a:buChar char="•"/>
+            </a:pPr>
+            <a:r>
+              <a:rPr lang="en-US" sz="1800" dirty="0">
+                <a:solidFill>
+                  <a:srgbClr val="111111"/>
+                </a:solidFill>
+                <a:latin typeface="Calibri" pitchFamily="34" charset="0"/>
+                <a:ea typeface="Calibri" pitchFamily="34" charset="-122"/>
+                <a:cs typeface="Calibri" pitchFamily="34" charset="-120"/>
+              </a:rPr>
+              <a:t>Photo, Activity 4: “Kilimanjaro” by ian 1602, CC BY-NC 2.0, via Flickr (https://www.flickr.com/photos/98181641@N00/2179855841)</a:t>
+            </a:r>
+            <a:endParaRPr lang="en-US" sz="1800" dirty="0"/>
+          </a:p>
+          <a:p>
+            <a:pPr algn="l" marL="342900" indent="-342900">
+              <a:spcAft>
+                <a:spcPts val="800"/>
+              </a:spcAft>
+              <a:buSzPct val="100000"/>
+              <a:buChar char="•"/>
+            </a:pPr>
+            <a:r>
+              <a:rPr lang="en-US" sz="1800" dirty="0">
+                <a:solidFill>
+                  <a:srgbClr val="111111"/>
+                </a:solidFill>
+                <a:latin typeface="Calibri" pitchFamily="34" charset="0"/>
+                <a:ea typeface="Calibri" pitchFamily="34" charset="-122"/>
+                <a:cs typeface="Calibri" pitchFamily="34" charset="-120"/>
+              </a:rPr>
+              <a:t>Photo, Activity 5: “Egypt-5B-023 - Approaching Aswan” by archer10 (Dennis), CC BY-SA 2.0, via Flickr (https://www.flickr.com/photos/22490717@N02/2217394088)</a:t>
+            </a:r>
+            <a:endParaRPr lang="en-US" sz="1800" dirty="0"/>
+          </a:p>
+          <a:p>
+            <a:pPr algn="l" marL="342900" indent="-342900">
+              <a:spcAft>
+                <a:spcPts val="800"/>
+              </a:spcAft>
+              <a:buSzPct val="100000"/>
+              <a:buChar char="•"/>
+            </a:pPr>
+            <a:r>
+              <a:rPr lang="en-US" sz="1800" dirty="0">
+                <a:solidFill>
+                  <a:srgbClr val="111111"/>
+                </a:solidFill>
+                <a:latin typeface="Calibri" pitchFamily="34" charset="0"/>
+                <a:ea typeface="Calibri" pitchFamily="34" charset="-122"/>
+                <a:cs typeface="Calibri" pitchFamily="34" charset="-120"/>
+              </a:rPr>
+              <a:t>Diagrams and animations: drawn for this lesson (Geography Department).</a:t>
+            </a:r>
+            <a:endParaRPr lang="en-US" sz="1800" dirty="0"/>
+          </a:p>
+        </p:txBody>
+      </p:sp>
+      <p:sp>
+        <p:nvSpPr>
+          <p:cNvPr id="25" name="Slide Number Placeholder 0"/>
+          <p:cNvSpPr>
+            <a:spLocks noGrp="1"/>
+          </p:cNvSpPr>
+          <p:nvPr>
+            <p:ph type="sldNum" sz="quarter" idx="4294967295"/>
+          </p:nvPr>
+        </p:nvSpPr>
+        <p:spPr>
+          <a:xfrm>
+            <a:off x="27432" y="91440"/>
+            <a:ext cx="585216" cy="475488"/>
+          </a:xfrm>
+          <a:prstGeom prst="rect">
+            <a:avLst/>
+          </a:prstGeom>
+          <a:extLst>
+            <a:ext uri="{C572A759-6A51-4108-AA02-DFA0A04FC94B}">
+              <ma14:wrappingTextBoxFlag xmlns:ma14="http://schemas.microsoft.com/office/mac/drawingml/2011/main" val="0"/>
+            </a:ext>
+          </a:extLst>
+        </p:spPr>
+        <p:txBody>
+          <a:bodyPr/>
+          <a:lstStyle>
+            <a:lvl1pPr>
+              <a:defRPr sz="2000">
+                <a:solidFill>
+                  <a:srgbClr val="FFFFFF"/>
+                </a:solidFill>
+                <a:latin typeface="Calibri"/>
+                <a:ea typeface="Calibri"/>
+                <a:cs typeface="Calibri"/>
+              </a:defRPr>
+            </a:lvl1pPr>
+          </a:lstStyle>
+          <a:p>
+            <a:pPr algn="ctr"/>
+            <a:fld id="{F7021451-1387-4CA6-816F-3879F97B5CBC}" type="slidenum">
+              <a:rPr b="1" lang="en-US"/>
+              <a:t>53</a:t>
             </a:fld>
             <a:endParaRPr lang="en-US"/>
           </a:p>

--- a/lecons/F2T/26_S20_L6_P1_Africa_Location_Physical.pptx
+++ b/lecons/F2T/26_S20_L6_P1_Africa_Location_Physical.pptx
@@ -3106,7 +3106,7 @@
           <a:p>
             <a:r>
               <a:rPr lang="en-US" dirty="0"/>
-              <a:t>Let us copy Location. Africa is located as follows. Copy the point on Latitudes on the left, then draw the diagram on the right: africa and the seas around it. Give it a title and label it clearly.</a:t>
+              <a:t>Let us copy Location. The location and size of Africa are the following. Copy the point on Latitudes on the left, then draw the diagram on the right: africa and the seas around it. Give it a title and label it clearly.</a:t>
             </a:r>
             <a:endParaRPr lang="en-US" dirty="0"/>
           </a:p>
@@ -13961,7 +13961,7 @@
                 <a:ea typeface="Times New Roman" pitchFamily="34" charset="-122"/>
                 <a:cs typeface="Times New Roman" pitchFamily="34" charset="-120"/>
               </a:rPr>
-              <a:t>Africa is located as follows:</a:t>
+              <a:t>The location and size of Africa are the following:</a:t>
             </a:r>
             <a:endParaRPr lang="en-US" sz="3600" dirty="0"/>
           </a:p>

--- a/lecons/F2T/26_S20_L6_P1_Africa_Location_Physical.pptx
+++ b/lecons/F2T/26_S20_L6_P1_Africa_Location_Physical.pptx
@@ -3458,7 +3458,7 @@
           <a:p>
             <a:r>
               <a:rPr lang="en-US" dirty="0"/>
-              <a:t>Before we start the new lesson, let us correct the homework I gave you at the end of Lesson 5 (Part 6): The Sectors of the Economy: The Quaternary Sector (Definition and Examples). The question was: On a map of Africa in your atlas, find Cameroon and name the four oceans and seas that surround Africa. Take out your exercise books.</a:t>
+              <a:t>Before we start the new lesson, let us correct the homework I gave you at the end of Lesson 5 (Part 6): The Sectors of the Economy: The Quaternary Sector (Definition and Examples). The question was: Name the four oceans and seas around Africa. Take out your exercise books.</a:t>
             </a:r>
             <a:endParaRPr lang="en-US" dirty="0"/>
           </a:p>
@@ -4162,7 +4162,7 @@
           <a:p>
             <a:r>
               <a:rPr lang="en-US" dirty="0"/>
-              <a:t>For your homework: Compare the climate of Douala, Garoua and Maroua. Which town is the wettest, and which is the driest? Ask an adult or use your textbook. We shall correct it at the beginning of our next lesson.</a:t>
+              <a:t>For your homework: Name three climates of Africa. We shall correct it at the beginning of our next lesson.</a:t>
             </a:r>
             <a:endParaRPr lang="en-US" dirty="0"/>
           </a:p>
@@ -4426,7 +4426,7 @@
           <a:p>
             <a:r>
               <a:rPr lang="en-US" dirty="0"/>
-              <a:t>Here is a good answer. Africa is surrounded by the Atlantic Ocean (west), the Indian Ocean (east), the Mediterranean Sea (north) and the Red Sea (north-east). Compare it with your own answer and correct your work in red.</a:t>
+              <a:t>Here is a good answer. The Atlantic Ocean, the Indian Ocean, the Mediterranean Sea and the Red Sea. Compare it with your own answer and correct your work in red.</a:t>
             </a:r>
             <a:endParaRPr lang="en-US" dirty="0"/>
           </a:p>
@@ -15049,7 +15049,7 @@
         <p:spPr>
           <a:xfrm>
             <a:off x="0" y="658368"/>
-            <a:ext cx="2468880" cy="5833872"/>
+            <a:ext cx="5120640" cy="5833872"/>
           </a:xfrm>
           <a:prstGeom prst="rect">
             <a:avLst/>
@@ -15064,8 +15064,8 @@
         </p:nvSpPr>
         <p:spPr>
           <a:xfrm>
-            <a:off x="2697480" y="1005840"/>
-            <a:ext cx="9174175" cy="731520"/>
+            <a:off x="5349240" y="1005840"/>
+            <a:ext cx="6522415" cy="731520"/>
           </a:xfrm>
           <a:prstGeom prst="rect">
             <a:avLst/>
@@ -15105,8 +15105,8 @@
         </p:nvSpPr>
         <p:spPr>
           <a:xfrm>
-            <a:off x="2697480" y="1783080"/>
-            <a:ext cx="9174175" cy="4663440"/>
+            <a:off x="5349240" y="1783080"/>
+            <a:ext cx="6522415" cy="4663440"/>
           </a:xfrm>
           <a:prstGeom prst="rect">
             <a:avLst/>
@@ -15153,7 +15153,7 @@
                 <a:ea typeface="Times New Roman" pitchFamily="34" charset="-122"/>
                 <a:cs typeface="Times New Roman" pitchFamily="34" charset="-120"/>
               </a:rPr>
-              <a:t>On a map of Africa in your atlas, find Cameroon and name the four oceans and seas that surround Africa.</a:t>
+              <a:t>Name the four oceans and seas around Africa.</a:t>
             </a:r>
             <a:endParaRPr lang="en-US" sz="4000" dirty="0"/>
           </a:p>
@@ -17126,7 +17126,7 @@
                 <a:ea typeface="Times New Roman" pitchFamily="34" charset="-122"/>
                 <a:cs typeface="Times New Roman" pitchFamily="34" charset="-120"/>
               </a:rPr>
-              <a:t>Compare the climate of Douala, Garoua and Maroua. Which town is the wettest, and which is the driest? Ask an adult or use your textbook.</a:t>
+              <a:t>Name three climates of Africa.</a:t>
             </a:r>
             <a:endParaRPr lang="en-US" sz="4000" dirty="0"/>
           </a:p>
@@ -19007,7 +19007,7 @@
                 <a:ea typeface="Times New Roman" pitchFamily="34" charset="-122"/>
                 <a:cs typeface="Times New Roman" pitchFamily="34" charset="-120"/>
               </a:rPr>
-              <a:t>Africa is surrounded by the Atlantic Ocean (west), the Indian Ocean (east), the Mediterranean Sea (north) and the Red Sea (north-east).</a:t>
+              <a:t>The Atlantic Ocean, the Indian Ocean, the Mediterranean Sea and the Red Sea.</a:t>
             </a:r>
             <a:endParaRPr lang="en-US" sz="4000" dirty="0"/>
           </a:p>
@@ -20285,7 +20285,7 @@
                           <a:ea typeface="Calibri" pitchFamily="34" charset="-122"/>
                           <a:cs typeface="Calibri" pitchFamily="34" charset="-120"/>
                         </a:rPr>
-                        <a:t>Compare the climate of Douala, Garoua and Maroua. Which town is the wettest, and which is the driest? Ask an adult or use your textbook.</a:t>
+                        <a:t>Name three climates of Africa.</a:t>
                       </a:r>
                       <a:endParaRPr lang="en-US" sz="1600" dirty="0">
                         <a:latin typeface="Calibri" charset="0"/>
